--- a/docs/Freshia_Njoki_Obj34_Findings_Presentation.pptx
+++ b/docs/Freshia_Njoki_Obj34_Findings_Presentation.pptx
@@ -513,7 +513,7 @@
           <a:lstStyle/>
           <a:p>
             <a:r>
-              <a:t>0:00–0:30. Thank the panel. Say this talk reports Objectives 3 and 4 only, using the improved evaluation on branch cursor/improve-ev-routing-framework-c48b. One sentence on what the artefact is: GRU speeds + time-dependent A* + a remaining-time threshold, as dispatcher support. Do not mention 78%, 123 seconds, or 0.17%.</a:t>
+              <a:t>0:00–0:30. Thank the chair, supervisors, and examiners. One sentence: this seminar reports a decision-support framework that forecasts short-horizon traffic speeds and uses those forecasts to route an emergency vehicle before congestion is met. The dispatcher keeps authority. Then preview the arc: problem → purpose and objectives → method → prediction → routing results → limits. Stay inside 15 minutes.</a:t>
             </a:r>
           </a:p>
         </p:txBody>
@@ -583,7 +583,7 @@
           <a:lstStyle/>
           <a:p>
             <a:r>
-              <a:t>10:00–11:30. This is the 4.6 discussion in spoken form. Do not defend 18.6% coverage or zero replans. Those belonged to the unused OSM map and the old remaining-time bug. If asked about Nairobi: method can transfer; these percentages cannot until local sensors exist.</a:t>
+              <a:t>10:45–11:30. Combined ≈ 40 milliseconds is the system claim. Quote both pieces if asked: 0.37 ms is search only. Werner et al. showed that time-dependent A* can be fast on very large maps with preprocessing; at 207 nodes that preprocessing was unnecessary.</a:t>
             </a:r>
           </a:p>
         </p:txBody>
@@ -653,7 +653,7 @@
           <a:lstStyle/>
           <a:p>
             <a:r>
-              <a:t>11:30–13:00. This is the 5.5 correction: we do not reduce the old 18.6% map further. Sparse Nairobi work starts from the 100% detector graph and downsamples it. Journal article v0.3 already uses 3.48, 16.19%, 207 nodes, δ = 0.20 — do not paste OSM 18.6% into the paper as the result graph.</a:t>
+              <a:t>11:30–13:00. This is the examiners’ honesty slide. State what was measured and what was not. The next sparse-sensor study starts from the 100% detector graph and downsamples it. Do not discuss shrinking an unused downtown map. If asked whether Nairobi now meets an eight-minute target: no. Motivation is not measurement.</a:t>
             </a:r>
           </a:p>
         </p:txBody>
@@ -723,7 +723,7 @@
           <a:lstStyle/>
           <a:p>
             <a:r>
-              <a:t>13:00–15:00 including questions. Repeat the three lines if asked to summarise. If asked which branch: cursor/improve-ev-routing-framework-c48b — not main. If asked to pull: git fetch &amp;&amp; git checkout that branch &amp;&amp; git pull, then PYTHONUTF8=1 and run_improved_pipeline.sh, or skip retrain and python -m src.evaluation.run_simulation --graph sensor if models already exist.</a:t>
+              <a:t>13:00–15:00 including questions. Repeat the three numbered lines if asked to summarise. If asked for the code: the evaluation lives in the project repository; the defended tables match results/full_report.txt on the improved-evaluation branch. If asked why two datasets: prediction generalisation versus routing on one consistent graph. If asked about δ = 0.10: that was the planned guess; measurement selected 0.20.</a:t>
             </a:r>
           </a:p>
         </p:txBody>
@@ -793,7 +793,7 @@
           <a:lstStyle/>
           <a:p>
             <a:r>
-              <a:t>0:30–1:30. Correct the previous presentation: MAE is 3.48 not 3.42; 34,272 frames not 34,254; StandardScaler on train only, not MinMax; routing graph is the sensor graph, not 397 OSM nodes. PEMS-BAY is a second GRU, not a second 900-run.</a:t>
+              <a:t>0:30–1:45. State the problem in operational language. Do not open with architecture. If asked about Nairobi: the purpose is motivated by local EMS delay; the measured percentages come from Los Angeles detectors. Method can transfer; numbers cannot until local sensors exist.</a:t>
             </a:r>
           </a:p>
         </p:txBody>
@@ -863,7 +863,7 @@
           <a:lstStyle/>
           <a:p>
             <a:r>
-              <a:t>1:30–2:30. Stress pairing: the same ambulance, same departure, five brains choosing the path, marked on actual future speeds. Incident = 40% slowdown on the planned corridor so the vehicle actually meets the jam. Peak = slowest quarter of windows; off-peak = fastest quarter.</a:t>
+              <a:t>1:45–3:15. Read the purpose once. Then: four questions map onto four objectives. RQ3’s δ is a dispatcher setting, not a p-value. RQ4’s 1-second cap is the operational constraint. Tell them you will spend most of the remaining time on Objectives 3 and 4 because that is new evidence.</a:t>
             </a:r>
           </a:p>
         </p:txBody>
@@ -933,7 +933,7 @@
           <a:lstStyle/>
           <a:p>
             <a:r>
-              <a:t>2:30–3:30. This is the slide that stops the two 0.05s being mixed. Remaining time is from where the vehicle is now — that is why replans exist in the new run. If T_old was the original full trip from the station, the controller stayed silent.</a:t>
+              <a:t>3:15–4:15. Walk 1→6 left to right, then down. Emphasise remaining time from the vehicle’s current position, not the original station-to-scene total. Two GRUs exist (METR-LA and PEMS-BAY); only the Los Angeles model feeds routing. This is decision support, not an automated ambulance.</a:t>
             </a:r>
           </a:p>
         </p:txBody>
@@ -1003,7 +1003,7 @@
           <a:lstStyle/>
           <a:p>
             <a:r>
-              <a:t>3:30–5:00. Point at the orange incident line: it is high and flat. F near zero is not a failed study — a 40% corridor drop is larger than 20% remaining-time growth, so every policy fired. That is why we do not pick δ by travel time.</a:t>
+              <a:t>4:15–5:30. Two datasets, two models — not one joint 207+325 tensor. Routing uses only METR-LA. The graph is the detector adjacency with 100% coverage, not an OpenStreetMap downtown extract. Incident means the vehicle actually meets a slowed corridor. B4 is an unreachable ceiling so the framework must not beat it. B3 replans after the jam is already visible.</a:t>
             </a:r>
           </a:p>
         </p:txBody>
@@ -1073,7 +1073,7 @@
           <a:lstStyle/>
           <a:p>
             <a:r>
-              <a:t>5:00–6:00. Highlight the last row. Slightly fewer alerts, same travel time. Do not say 0.10 is still recommended. Combined wait is not this 0.37 ms — that is routing only; GRU is ~39 ms.</a:t>
+              <a:t>5:30–6:30. Quote 3.48 and 2.38. Chronological 70/15/15 split. Train-only scaler. If asked why not a graph neural net: latency budget and a proof-of-concept two-layer GRU; literature already shows GNNs can win on MAE. You traded a little accuracy for a 40 ms loop.</a:t>
             </a:r>
           </a:p>
         </p:txBody>
@@ -1143,7 +1143,7 @@
           <a:lstStyle/>
           <a:p>
             <a:r>
-              <a:t>6:00–7:30. This replaces 123 s versus 588 s, which was a scaling bug. Tell them: when the planned road is jammed, 728 seconds falls to about 599. Off-peak bars sit on top of each other — empty roads do not need a fortune-teller.</a:t>
+              <a:t>6:30–8:00. Point at the flat incident line. A 40% corridor drop exceeds a 20% remaining-time trigger, so every policy still fires in incidents. That is why travel time tied and you pick the least chatty setting. APA: p = .0002, no leading zero. Do not call F ≈ 0 a failed study.</a:t>
             </a:r>
           </a:p>
         </p:txBody>
@@ -1213,7 +1213,7 @@
           <a:lstStyle/>
           <a:p>
             <a:r>
-              <a:t>7:30–9:00. The 16% bar is the result that matches the purpose: emergency time reduction when traffic actually breaks. +5.74% overall is a mixture — do not promise 16% on every trip. Versus reactive A* the extra is small: once the jam is visible, a 30-minute forecast adds little. That is honest. Green 15% line is a plot decoration, not a WHO target.</a:t>
+              <a:t>8:00–9:15. When the planned road is jammed, 728 seconds falls to about 599. Off-peak bars sit together: empty roads do not need a 30-minute forecast. Peak is a small gap. Reactive A* is close in incidents once the jam is visible — the extra value of the forecast is anticipatory, not magic.</a:t>
             </a:r>
           </a:p>
         </p:txBody>
@@ -1283,7 +1283,7 @@
           <a:lstStyle/>
           <a:p>
             <a:r>
-              <a:t>9:00–10:00. Combined 40 milliseconds is the DSS claim. 0.315 milliseconds was TD-A* on the old 397-node map and was never the full system wait. If asked about 3,175×, that used 0.315 against 1,000; the honest factor is about 25 times (1000/40).</a:t>
+              <a:t>9:15–10:45. The 16% bar is the result that matches the purpose: time reduction when traffic actually breaks. Peak +1% is statistically detectable but operationally small. Off-peak ≈ 0% is a successful negative control. Versus reactive A* the extra is small: once the jam is visible, a 30-minute forecast adds little. That is an honest finding. If asked about literature: 16% sits near Abuaisha et al. (2025) 12–18% on a different (fixed-route) problem; Werner et al. (2022) is the closest router and does not use this GRU + δ loop.</a:t>
             </a:r>
           </a:p>
         </p:txBody>
@@ -4370,7 +4370,7 @@
                 </a:solidFill>
                 <a:latin typeface="Calibri"/>
               </a:rPr>
-              <a:t>KIRINYAGA UNIVERSITY  ·  MSc COMPUTER SCIENCE</a:t>
+              <a:t>KIRINYAGA UNIVERSITY  ·  SCHOOL OF PURE AND APPLIED SCIENCES</a:t>
             </a:r>
           </a:p>
         </p:txBody>
@@ -4383,8 +4383,8 @@
         </p:nvSpPr>
         <p:spPr>
           <a:xfrm>
-            <a:off x="548640" y="1051560"/>
-            <a:ext cx="10972800" cy="1463040"/>
+            <a:off x="548640" y="960120"/>
+            <a:ext cx="10972800" cy="1554480"/>
           </a:xfrm>
           <a:prstGeom prst="rect">
             <a:avLst/>
@@ -4419,7 +4419,7 @@
         </p:nvSpPr>
         <p:spPr>
           <a:xfrm>
-            <a:off x="548640" y="2697480"/>
+            <a:off x="548640" y="2606040"/>
             <a:ext cx="2743200" cy="54864"/>
           </a:xfrm>
           <a:prstGeom prst="rect">
@@ -4462,7 +4462,7 @@
         </p:nvSpPr>
         <p:spPr>
           <a:xfrm>
-            <a:off x="548640" y="2926080"/>
+            <a:off x="548640" y="2834640"/>
             <a:ext cx="10972800" cy="365760"/>
           </a:xfrm>
           <a:prstGeom prst="rect">
@@ -4484,7 +4484,7 @@
                 </a:solidFill>
                 <a:latin typeface="Calibri"/>
               </a:rPr>
-              <a:t>Research Progress Presentation  —  Objectives 3 &amp; 4 findings</a:t>
+              <a:t>Master of Science in Computer Science  ·  Research seminar (15 minutes)</a:t>
             </a:r>
           </a:p>
         </p:txBody>
@@ -4497,8 +4497,8 @@
         </p:nvSpPr>
         <p:spPr>
           <a:xfrm>
-            <a:off x="548640" y="3657600"/>
-            <a:ext cx="10972800" cy="731520"/>
+            <a:off x="548640" y="3383280"/>
+            <a:ext cx="10972800" cy="1005840"/>
           </a:xfrm>
           <a:prstGeom prst="rect">
             <a:avLst/>
@@ -4533,8 +4533,8 @@
         </p:nvSpPr>
         <p:spPr>
           <a:xfrm>
-            <a:off x="548640" y="4846320"/>
-            <a:ext cx="10972800" cy="365760"/>
+            <a:off x="548640" y="4709160"/>
+            <a:ext cx="10972800" cy="640080"/>
           </a:xfrm>
           <a:prstGeom prst="rect">
             <a:avLst/>
@@ -4549,13 +4549,14 @@
           <a:p>
             <a:pPr algn="l"/>
             <a:r>
-              <a:rPr sz="1400" b="0">
+              <a:rPr sz="1500" b="0">
                 <a:solidFill>
                   <a:srgbClr val="E8A838"/>
                 </a:solidFill>
                 <a:latin typeface="Calibri"/>
               </a:rPr>
-              <a:t>Defended results  ·  900 ground-truth journeys  ·  METR-LA detector graph</a:t>
+              <a:t>Artefact: two-layer GRU speed forecasts + time-dependent A* + remaining-time controller
+Evaluation: 900 ground-truth journeys on the METR-LA detector graph</a:t>
             </a:r>
           </a:p>
         </p:txBody>
@@ -4749,8 +4750,8 @@
         </p:nvSpPr>
         <p:spPr>
           <a:xfrm>
-            <a:off x="457200" y="256032"/>
-            <a:ext cx="10972800" cy="411480"/>
+            <a:off x="457200" y="201168"/>
+            <a:ext cx="10972800" cy="365760"/>
           </a:xfrm>
           <a:prstGeom prst="rect">
             <a:avLst/>
@@ -4765,27 +4766,51 @@
           <a:p>
             <a:pPr algn="l"/>
             <a:r>
-              <a:rPr sz="2600" b="1">
+              <a:rPr sz="2400" b="1">
                 <a:solidFill>
                   <a:srgbClr val="FFFFFF"/>
                 </a:solidFill>
                 <a:latin typeface="Cambria"/>
               </a:rPr>
-              <a:t>What the results mean</a:t>
-            </a:r>
-          </a:p>
-        </p:txBody>
-      </p:sp>
-      <p:sp>
-        <p:nvSpPr>
-          <p:cNvPr id="4" name="Rounded Rectangle 3"/>
+              <a:t>Computational feasibility</a:t>
+            </a:r>
+          </a:p>
+        </p:txBody>
+      </p:sp>
+      <p:pic>
+        <p:nvPicPr>
+          <p:cNvPr id="4" name="Picture 3" descr="fig4_computational_performance.png"/>
+          <p:cNvPicPr>
+            <a:picLocks noChangeAspect="1"/>
+          </p:cNvPicPr>
+          <p:nvPr/>
+        </p:nvPicPr>
+        <p:blipFill>
+          <a:blip r:embed="rId2"/>
+          <a:stretch>
+            <a:fillRect/>
+          </a:stretch>
+        </p:blipFill>
+        <p:spPr>
+          <a:xfrm>
+            <a:off x="228600" y="640080"/>
+            <a:ext cx="7589520" cy="3154308"/>
+          </a:xfrm>
+          <a:prstGeom prst="rect">
+            <a:avLst/>
+          </a:prstGeom>
+        </p:spPr>
+      </p:pic>
+      <p:sp>
+        <p:nvSpPr>
+          <p:cNvPr id="5" name="Rounded Rectangle 4"/>
           <p:cNvSpPr/>
           <p:nvPr/>
         </p:nvSpPr>
         <p:spPr>
           <a:xfrm>
-            <a:off x="457200" y="822960"/>
-            <a:ext cx="11247120" cy="1143000"/>
+            <a:off x="7955279" y="640080"/>
+            <a:ext cx="3886200" cy="5212080"/>
           </a:xfrm>
           <a:prstGeom prst="roundRect">
             <a:avLst/>
@@ -4821,14 +4846,14 @@
       </p:sp>
       <p:sp>
         <p:nvSpPr>
-          <p:cNvPr id="5" name="TextBox 4"/>
+          <p:cNvPr id="6" name="TextBox 5"/>
           <p:cNvSpPr txBox="1"/>
           <p:nvPr/>
         </p:nvSpPr>
         <p:spPr>
           <a:xfrm>
-            <a:off x="685800" y="932688"/>
-            <a:ext cx="10789920" cy="292608"/>
+            <a:off x="8138160" y="822960"/>
+            <a:ext cx="3566160" cy="320040"/>
           </a:xfrm>
           <a:prstGeom prst="rect">
             <a:avLst/>
@@ -4849,21 +4874,21 @@
                 </a:solidFill>
                 <a:latin typeface="Calibri"/>
               </a:rPr>
-              <a:t>Incident +16%</a:t>
-            </a:r>
-          </a:p>
-        </p:txBody>
-      </p:sp>
-      <p:sp>
-        <p:nvSpPr>
-          <p:cNvPr id="6" name="TextBox 5"/>
+              <a:t>Dispatcher wait</a:t>
+            </a:r>
+          </a:p>
+        </p:txBody>
+      </p:sp>
+      <p:sp>
+        <p:nvSpPr>
+          <p:cNvPr id="7" name="TextBox 6"/>
           <p:cNvSpPr txBox="1"/>
           <p:nvPr/>
         </p:nvSpPr>
         <p:spPr>
           <a:xfrm>
-            <a:off x="685800" y="1261872"/>
-            <a:ext cx="10789920" cy="594360"/>
+            <a:off x="8138160" y="1280160"/>
+            <a:ext cx="3566160" cy="4297680"/>
           </a:xfrm>
           <a:prstGeom prst="rect">
             <a:avLst/>
@@ -4884,353 +4909,20 @@
                 </a:solidFill>
                 <a:latin typeface="Calibri"/>
               </a:rPr>
-              <a:t>The planned road is crawling. The system offers another corridor. About one suggestion per journey — not a siren.</a:t>
-            </a:r>
-          </a:p>
-        </p:txBody>
-      </p:sp>
-      <p:sp>
-        <p:nvSpPr>
-          <p:cNvPr id="7" name="Rounded Rectangle 6"/>
-          <p:cNvSpPr/>
-          <p:nvPr/>
-        </p:nvSpPr>
-        <p:spPr>
-          <a:xfrm>
-            <a:off x="457200" y="2103120"/>
-            <a:ext cx="11247120" cy="1143000"/>
-          </a:xfrm>
-          <a:prstGeom prst="roundRect">
-            <a:avLst/>
-          </a:prstGeom>
-          <a:solidFill>
-            <a:srgbClr val="2A357A"/>
-          </a:solidFill>
-          <a:ln>
-            <a:noFill/>
-          </a:ln>
-        </p:spPr>
-        <p:style>
-          <a:lnRef idx="1">
-            <a:schemeClr val="accent1"/>
-          </a:lnRef>
-          <a:fillRef idx="3">
-            <a:schemeClr val="accent1"/>
-          </a:fillRef>
-          <a:effectRef idx="2">
-            <a:schemeClr val="accent1"/>
-          </a:effectRef>
-          <a:fontRef idx="minor">
-            <a:schemeClr val="lt1"/>
-          </a:fontRef>
-        </p:style>
-        <p:txBody>
-          <a:bodyPr rtlCol="0" anchor="ctr"/>
-          <a:lstStyle/>
-          <a:p>
-            <a:pPr algn="ctr"/>
-          </a:p>
-        </p:txBody>
-      </p:sp>
-      <p:sp>
-        <p:nvSpPr>
-          <p:cNvPr id="8" name="TextBox 7"/>
-          <p:cNvSpPr txBox="1"/>
-          <p:nvPr/>
-        </p:nvSpPr>
-        <p:spPr>
-          <a:xfrm>
-            <a:off x="685800" y="2212848"/>
-            <a:ext cx="10789920" cy="292608"/>
-          </a:xfrm>
-          <a:prstGeom prst="rect">
-            <a:avLst/>
-          </a:prstGeom>
-          <a:noFill/>
-        </p:spPr>
-        <p:txBody>
-          <a:bodyPr wrap="square">
-            <a:spAutoFit/>
-          </a:bodyPr>
-          <a:lstStyle/>
-          <a:p>
-            <a:pPr algn="l"/>
-            <a:r>
-              <a:rPr sz="1600" b="1">
-                <a:solidFill>
-                  <a:srgbClr val="E8A838"/>
-                </a:solidFill>
-                <a:latin typeface="Calibri"/>
-              </a:rPr>
-              <a:t>Peak +1%</a:t>
-            </a:r>
-          </a:p>
-        </p:txBody>
-      </p:sp>
-      <p:sp>
-        <p:nvSpPr>
-          <p:cNvPr id="9" name="TextBox 8"/>
-          <p:cNvSpPr txBox="1"/>
-          <p:nvPr/>
-        </p:nvSpPr>
-        <p:spPr>
-          <a:xfrm>
-            <a:off x="685800" y="2542032"/>
-            <a:ext cx="10789920" cy="594360"/>
-          </a:xfrm>
-          <a:prstGeom prst="rect">
-            <a:avLst/>
-          </a:prstGeom>
-          <a:noFill/>
-        </p:spPr>
-        <p:txBody>
-          <a:bodyPr wrap="square">
-            <a:spAutoFit/>
-          </a:bodyPr>
-          <a:lstStyle/>
-          <a:p>
-            <a:pPr algn="l"/>
-            <a:r>
-              <a:rPr sz="1500" b="0">
-                <a:solidFill>
-                  <a:srgbClr val="FFFFFF"/>
-                </a:solidFill>
-                <a:latin typeface="Calibri"/>
-              </a:rPr>
-              <a:t>Almost every detector is already slow. Looking 15–30 minutes ahead helps only a little. Still statistically detectable.</a:t>
-            </a:r>
-          </a:p>
-        </p:txBody>
-      </p:sp>
-      <p:sp>
-        <p:nvSpPr>
-          <p:cNvPr id="10" name="Rounded Rectangle 9"/>
-          <p:cNvSpPr/>
-          <p:nvPr/>
-        </p:nvSpPr>
-        <p:spPr>
-          <a:xfrm>
-            <a:off x="457200" y="3383279"/>
-            <a:ext cx="11247120" cy="1143000"/>
-          </a:xfrm>
-          <a:prstGeom prst="roundRect">
-            <a:avLst/>
-          </a:prstGeom>
-          <a:solidFill>
-            <a:srgbClr val="2A357A"/>
-          </a:solidFill>
-          <a:ln>
-            <a:noFill/>
-          </a:ln>
-        </p:spPr>
-        <p:style>
-          <a:lnRef idx="1">
-            <a:schemeClr val="accent1"/>
-          </a:lnRef>
-          <a:fillRef idx="3">
-            <a:schemeClr val="accent1"/>
-          </a:fillRef>
-          <a:effectRef idx="2">
-            <a:schemeClr val="accent1"/>
-          </a:effectRef>
-          <a:fontRef idx="minor">
-            <a:schemeClr val="lt1"/>
-          </a:fontRef>
-        </p:style>
-        <p:txBody>
-          <a:bodyPr rtlCol="0" anchor="ctr"/>
-          <a:lstStyle/>
-          <a:p>
-            <a:pPr algn="ctr"/>
-          </a:p>
-        </p:txBody>
-      </p:sp>
-      <p:sp>
-        <p:nvSpPr>
-          <p:cNvPr id="11" name="TextBox 10"/>
-          <p:cNvSpPr txBox="1"/>
-          <p:nvPr/>
-        </p:nvSpPr>
-        <p:spPr>
-          <a:xfrm>
-            <a:off x="685800" y="3493008"/>
-            <a:ext cx="10789920" cy="292608"/>
-          </a:xfrm>
-          <a:prstGeom prst="rect">
-            <a:avLst/>
-          </a:prstGeom>
-          <a:noFill/>
-        </p:spPr>
-        <p:txBody>
-          <a:bodyPr wrap="square">
-            <a:spAutoFit/>
-          </a:bodyPr>
-          <a:lstStyle/>
-          <a:p>
-            <a:pPr algn="l"/>
-            <a:r>
-              <a:rPr sz="1600" b="1">
-                <a:solidFill>
-                  <a:srgbClr val="E8A838"/>
-                </a:solidFill>
-                <a:latin typeface="Calibri"/>
-              </a:rPr>
-              <a:t>Off-peak ≈ 0%</a:t>
-            </a:r>
-          </a:p>
-        </p:txBody>
-      </p:sp>
-      <p:sp>
-        <p:nvSpPr>
-          <p:cNvPr id="12" name="TextBox 11"/>
-          <p:cNvSpPr txBox="1"/>
-          <p:nvPr/>
-        </p:nvSpPr>
-        <p:spPr>
-          <a:xfrm>
-            <a:off x="685800" y="3822191"/>
-            <a:ext cx="10789920" cy="594360"/>
-          </a:xfrm>
-          <a:prstGeom prst="rect">
-            <a:avLst/>
-          </a:prstGeom>
-          <a:noFill/>
-        </p:spPr>
-        <p:txBody>
-          <a:bodyPr wrap="square">
-            <a:spAutoFit/>
-          </a:bodyPr>
-          <a:lstStyle/>
-          <a:p>
-            <a:pPr algn="l"/>
-            <a:r>
-              <a:rPr sz="1500" b="0">
-                <a:solidFill>
-                  <a:srgbClr val="FFFFFF"/>
-                </a:solidFill>
-                <a:latin typeface="Calibri"/>
-              </a:rPr>
-              <a:t>Empty roads: a predictor and a paper map should agree. This is a successful negative control, not a failed model.</a:t>
-            </a:r>
-          </a:p>
-        </p:txBody>
-      </p:sp>
-      <p:sp>
-        <p:nvSpPr>
-          <p:cNvPr id="13" name="Rounded Rectangle 12"/>
-          <p:cNvSpPr/>
-          <p:nvPr/>
-        </p:nvSpPr>
-        <p:spPr>
-          <a:xfrm>
-            <a:off x="457200" y="4663440"/>
-            <a:ext cx="11247120" cy="1143000"/>
-          </a:xfrm>
-          <a:prstGeom prst="roundRect">
-            <a:avLst/>
-          </a:prstGeom>
-          <a:solidFill>
-            <a:srgbClr val="2A357A"/>
-          </a:solidFill>
-          <a:ln>
-            <a:noFill/>
-          </a:ln>
-        </p:spPr>
-        <p:style>
-          <a:lnRef idx="1">
-            <a:schemeClr val="accent1"/>
-          </a:lnRef>
-          <a:fillRef idx="3">
-            <a:schemeClr val="accent1"/>
-          </a:fillRef>
-          <a:effectRef idx="2">
-            <a:schemeClr val="accent1"/>
-          </a:effectRef>
-          <a:fontRef idx="minor">
-            <a:schemeClr val="lt1"/>
-          </a:fontRef>
-        </p:style>
-        <p:txBody>
-          <a:bodyPr rtlCol="0" anchor="ctr"/>
-          <a:lstStyle/>
-          <a:p>
-            <a:pPr algn="ctr"/>
-          </a:p>
-        </p:txBody>
-      </p:sp>
-      <p:sp>
-        <p:nvSpPr>
-          <p:cNvPr id="14" name="TextBox 13"/>
-          <p:cNvSpPr txBox="1"/>
-          <p:nvPr/>
-        </p:nvSpPr>
-        <p:spPr>
-          <a:xfrm>
-            <a:off x="685800" y="4773168"/>
-            <a:ext cx="10789920" cy="292608"/>
-          </a:xfrm>
-          <a:prstGeom prst="rect">
-            <a:avLst/>
-          </a:prstGeom>
-          <a:noFill/>
-        </p:spPr>
-        <p:txBody>
-          <a:bodyPr wrap="square">
-            <a:spAutoFit/>
-          </a:bodyPr>
-          <a:lstStyle/>
-          <a:p>
-            <a:pPr algn="l"/>
-            <a:r>
-              <a:rPr sz="1600" b="1">
-                <a:solidFill>
-                  <a:srgbClr val="E8A838"/>
-                </a:solidFill>
-                <a:latin typeface="Calibri"/>
-              </a:rPr>
-              <a:t>Literature</a:t>
-            </a:r>
-          </a:p>
-        </p:txBody>
-      </p:sp>
-      <p:sp>
-        <p:nvSpPr>
-          <p:cNvPr id="15" name="TextBox 14"/>
-          <p:cNvSpPr txBox="1"/>
-          <p:nvPr/>
-        </p:nvSpPr>
-        <p:spPr>
-          <a:xfrm>
-            <a:off x="685800" y="5102352"/>
-            <a:ext cx="10789920" cy="594360"/>
-          </a:xfrm>
-          <a:prstGeom prst="rect">
-            <a:avLst/>
-          </a:prstGeom>
-          <a:noFill/>
-        </p:spPr>
-        <p:txBody>
-          <a:bodyPr wrap="square">
-            <a:spAutoFit/>
-          </a:bodyPr>
-          <a:lstStyle/>
-          <a:p>
-            <a:pPr algn="l"/>
-            <a:r>
-              <a:rPr sz="1500" b="0">
-                <a:solidFill>
-                  <a:srgbClr val="FFFFFF"/>
-                </a:solidFill>
-                <a:latin typeface="Calibri"/>
-              </a:rPr>
-              <a:t>16% sits near Abuaisha et al. (2025) 12–18% (fixed transit, different problem). Werner et al. (2022) is the closest router and does not replace the GRU + δ loop.</a:t>
-            </a:r>
-          </a:p>
-        </p:txBody>
-      </p:sp>
-      <p:sp>
-        <p:nvSpPr>
-          <p:cNvPr id="16" name="Rectangle 15"/>
+              <a:t>TD-A* search   0.37 ms
+GRU inference   39.3 ms
+Combined        ≈ 40 ms
+Operational cap  1,000 ms
+Headroom         ≈ 25×
+Routing is not the bottleneck. The predictor is, and the loop still fits comfortably inside one second.
+No preprocessing of the graph is required at this urban scale, so edge weights can refresh every five minutes.</a:t>
+            </a:r>
+          </a:p>
+        </p:txBody>
+      </p:sp>
+      <p:sp>
+        <p:nvSpPr>
+          <p:cNvPr id="8" name="Rectangle 7"/>
           <p:cNvSpPr/>
           <p:nvPr/>
         </p:nvSpPr>
@@ -5273,7 +4965,7 @@
       </p:sp>
       <p:sp>
         <p:nvSpPr>
-          <p:cNvPr id="17" name="TextBox 16"/>
+          <p:cNvPr id="9" name="TextBox 8"/>
           <p:cNvSpPr txBox="1"/>
           <p:nvPr/>
         </p:nvSpPr>
@@ -5307,7 +4999,7 @@
       </p:sp>
       <p:sp>
         <p:nvSpPr>
-          <p:cNvPr id="18" name="TextBox 17"/>
+          <p:cNvPr id="10" name="TextBox 9"/>
           <p:cNvSpPr txBox="1"/>
           <p:nvPr/>
         </p:nvSpPr>
@@ -5439,7 +5131,7 @@
                 </a:solidFill>
                 <a:latin typeface="Cambria"/>
               </a:rPr>
-              <a:t>Limits — and what we are not claiming</a:t>
+              <a:t>Limitations and further research</a:t>
             </a:r>
           </a:p>
         </p:txBody>
@@ -5452,8 +5144,8 @@
         </p:nvSpPr>
         <p:spPr>
           <a:xfrm>
-            <a:off x="411480" y="868680"/>
-            <a:ext cx="5577840" cy="4754880"/>
+            <a:off x="411480" y="777240"/>
+            <a:ext cx="5577840" cy="5029200"/>
           </a:xfrm>
           <a:prstGeom prst="roundRect">
             <a:avLst/>
@@ -5495,8 +5187,8 @@
         </p:nvSpPr>
         <p:spPr>
           <a:xfrm>
-            <a:off x="640080" y="1051560"/>
-            <a:ext cx="5212080" cy="365760"/>
+            <a:off x="640080" y="960120"/>
+            <a:ext cx="5120640" cy="320040"/>
           </a:xfrm>
           <a:prstGeom prst="rect">
             <a:avLst/>
@@ -5517,7 +5209,7 @@
                 </a:solidFill>
                 <a:latin typeface="Calibri"/>
               </a:rPr>
-              <a:t>True limits</a:t>
+              <a:t>Limits of the present evidence</a:t>
             </a:r>
           </a:p>
         </p:txBody>
@@ -5530,8 +5222,8 @@
         </p:nvSpPr>
         <p:spPr>
           <a:xfrm>
-            <a:off x="640080" y="1508760"/>
-            <a:ext cx="5212080" cy="3840480"/>
+            <a:off x="640080" y="1417320"/>
+            <a:ext cx="5120640" cy="4114800"/>
           </a:xfrm>
           <a:prstGeom prst="rect">
             <a:avLst/>
@@ -5544,18 +5236,83 @@
           </a:bodyPr>
           <a:lstStyle/>
           <a:p>
-            <a:pPr algn="l"/>
-            <a:r>
-              <a:rPr sz="1500" b="0">
+            <a:pPr algn="l">
+              <a:spcAft>
+                <a:spcPts val="1000"/>
+              </a:spcAft>
+            </a:pPr>
+            <a:r>
+              <a:rPr sz="1400">
                 <a:solidFill>
                   <a:srgbClr val="FFFFFF"/>
                 </a:solidFill>
                 <a:latin typeface="Calibri"/>
               </a:rPr>
-              <a:t>•  METR-LA / PEMS-BAY are US freeways, not matatu traffic.
-•  900-run routing is Los Angeles detectors only (100% coverage).
-•  PEMS-BAY was a second-city GRU check, not a second routing city.
-•  A 10–30% sparse-sensor Nairobi analogue has not been run.</a:t>
+              <a:t>•  METR-LA and PEMS-BAY are United States freeway traces. They do not reproduce Nairobi mixed traffic.</a:t>
+            </a:r>
+          </a:p>
+          <a:p>
+            <a:pPr algn="l">
+              <a:spcAft>
+                <a:spcPts val="1000"/>
+              </a:spcAft>
+            </a:pPr>
+            <a:r>
+              <a:rPr sz="1400">
+                <a:solidFill>
+                  <a:srgbClr val="FFFFFF"/>
+                </a:solidFill>
+                <a:latin typeface="Calibri"/>
+              </a:rPr>
+              <a:t>•  The 900 journeys used 100% detector coverage (207 nodes, 1,515 edges). Reported percentages describe that graph.</a:t>
+            </a:r>
+          </a:p>
+          <a:p>
+            <a:pPr algn="l">
+              <a:spcAft>
+                <a:spcPts val="1000"/>
+              </a:spcAft>
+            </a:pPr>
+            <a:r>
+              <a:rPr sz="1400">
+                <a:solidFill>
+                  <a:srgbClr val="FFFFFF"/>
+                </a:solidFill>
+                <a:latin typeface="Calibri"/>
+              </a:rPr>
+              <a:t>•  PEMS-BAY confirmed prediction in a second city (MAE 2.38 mph) but was not given a routing 900-run.</a:t>
+            </a:r>
+          </a:p>
+          <a:p>
+            <a:pPr algn="l">
+              <a:spcAft>
+                <a:spcPts val="1000"/>
+              </a:spcAft>
+            </a:pPr>
+            <a:r>
+              <a:rPr sz="1400">
+                <a:solidFill>
+                  <a:srgbClr val="FFFFFF"/>
+                </a:solidFill>
+                <a:latin typeface="Calibri"/>
+              </a:rPr>
+              <a:t>•  A sparse-sensor analogue (10–30% coverage) was not executed.</a:t>
+            </a:r>
+          </a:p>
+          <a:p>
+            <a:pPr algn="l">
+              <a:spcAft>
+                <a:spcPts val="1000"/>
+              </a:spcAft>
+            </a:pPr>
+            <a:r>
+              <a:rPr sz="1400">
+                <a:solidFill>
+                  <a:srgbClr val="FFFFFF"/>
+                </a:solidFill>
+                <a:latin typeface="Calibri"/>
+              </a:rPr>
+              <a:t>•  Single-vehicle simulation: multi-ambulance interference was not modelled.</a:t>
             </a:r>
           </a:p>
         </p:txBody>
@@ -5568,8 +5325,8 @@
         </p:nvSpPr>
         <p:spPr>
           <a:xfrm>
-            <a:off x="6217920" y="868680"/>
-            <a:ext cx="5577840" cy="4754880"/>
+            <a:off x="6217920" y="777240"/>
+            <a:ext cx="5577840" cy="5029200"/>
           </a:xfrm>
           <a:prstGeom prst="roundRect">
             <a:avLst/>
@@ -5611,8 +5368,8 @@
         </p:nvSpPr>
         <p:spPr>
           <a:xfrm>
-            <a:off x="6446520" y="1051560"/>
-            <a:ext cx="5212080" cy="365760"/>
+            <a:off x="6446520" y="960120"/>
+            <a:ext cx="5120640" cy="320040"/>
           </a:xfrm>
           <a:prstGeom prst="rect">
             <a:avLst/>
@@ -5633,7 +5390,7 @@
                 </a:solidFill>
                 <a:latin typeface="Calibri"/>
               </a:rPr>
-              <a:t>Do not say</a:t>
+              <a:t>Suggested further work</a:t>
             </a:r>
           </a:p>
         </p:txBody>
@@ -5646,8 +5403,8 @@
         </p:nvSpPr>
         <p:spPr>
           <a:xfrm>
-            <a:off x="6446520" y="1508760"/>
-            <a:ext cx="5212080" cy="3840480"/>
+            <a:off x="6446520" y="1417320"/>
+            <a:ext cx="5120640" cy="4114800"/>
           </a:xfrm>
           <a:prstGeom prst="rect">
             <a:avLst/>
@@ -5660,18 +5417,83 @@
           </a:bodyPr>
           <a:lstStyle/>
           <a:p>
-            <a:pPr algn="l"/>
-            <a:r>
-              <a:rPr sz="1500" b="0">
+            <a:pPr algn="l">
+              <a:spcAft>
+                <a:spcPts val="1000"/>
+              </a:spcAft>
+            </a:pPr>
+            <a:r>
+              <a:rPr sz="1400">
                 <a:solidFill>
                   <a:srgbClr val="FFFFFF"/>
                 </a:solidFill>
                 <a:latin typeface="Calibri"/>
               </a:rPr>
-              <a:t>•  Do not convert +16% into CBD minutes against the WHO 8-minute target.
-•  Do not quote 3.42 mph, 17 epochs, 123 s, +0.17%, or 0 replans.
-•  Do not say the journal article still uses the OSM 18.6% graph.
-•  Further work: Bay routing graph; downsample 100% → 10–30%; field trial.</a:t>
+              <a:t>•  Downsample the present 100% detector graph to 10–30% coverage and repeat the 900-run, as a Nairobi-density analogue.</a:t>
+            </a:r>
+          </a:p>
+          <a:p>
+            <a:pPr algn="l">
+              <a:spcAft>
+                <a:spcPts val="1000"/>
+              </a:spcAft>
+            </a:pPr>
+            <a:r>
+              <a:rPr sz="1400">
+                <a:solidFill>
+                  <a:srgbClr val="FFFFFF"/>
+                </a:solidFill>
+                <a:latin typeface="Calibri"/>
+              </a:rPr>
+              <a:t>•  Build a PEMS-BAY routing graph and repeat Objectives 3 and 4.</a:t>
+            </a:r>
+          </a:p>
+          <a:p>
+            <a:pPr algn="l">
+              <a:spcAft>
+                <a:spcPts val="1000"/>
+              </a:spcAft>
+            </a:pPr>
+            <a:r>
+              <a:rPr sz="1400">
+                <a:solidFill>
+                  <a:srgbClr val="FFFFFF"/>
+                </a:solidFill>
+                <a:latin typeface="Calibri"/>
+              </a:rPr>
+              <a:t>•  Field trial with local sensors. The dispatcher remains in authority.</a:t>
+            </a:r>
+          </a:p>
+          <a:p>
+            <a:pPr algn="l">
+              <a:spcAft>
+                <a:spcPts val="1000"/>
+              </a:spcAft>
+            </a:pPr>
+            <a:r>
+              <a:rPr sz="1400">
+                <a:solidFill>
+                  <a:srgbClr val="FFFFFF"/>
+                </a:solidFill>
+                <a:latin typeface="Calibri"/>
+              </a:rPr>
+              <a:t>•  Multi-vehicle and live incident feeds lie beyond this proof of concept.</a:t>
+            </a:r>
+          </a:p>
+          <a:p>
+            <a:pPr algn="l">
+              <a:spcAft>
+                <a:spcPts val="1000"/>
+              </a:spcAft>
+            </a:pPr>
+            <a:r>
+              <a:rPr sz="1400">
+                <a:solidFill>
+                  <a:srgbClr val="FFFFFF"/>
+                </a:solidFill>
+                <a:latin typeface="Calibri"/>
+              </a:rPr>
+              <a:t>•  No conversion of +16% into Nairobi CBD minutes against an eight-minute target is claimed.</a:t>
             </a:r>
           </a:p>
         </p:txBody>
@@ -5865,7 +5687,7 @@
         </p:nvSpPr>
         <p:spPr>
           <a:xfrm>
-            <a:off x="457200" y="320040"/>
+            <a:off x="457200" y="292608"/>
             <a:ext cx="10972800" cy="457200"/>
           </a:xfrm>
           <a:prstGeom prst="rect">
@@ -5887,7 +5709,7 @@
                 </a:solidFill>
                 <a:latin typeface="Cambria"/>
               </a:rPr>
-              <a:t>Take-home for Objectives 3 and 4</a:t>
+              <a:t>Conclusions</a:t>
             </a:r>
           </a:p>
         </p:txBody>
@@ -5900,7 +5722,7 @@
         </p:nvSpPr>
         <p:spPr>
           <a:xfrm>
-            <a:off x="457200" y="1051560"/>
+            <a:off x="457200" y="914400"/>
             <a:ext cx="11247120" cy="1097280"/>
           </a:xfrm>
           <a:prstGeom prst="roundRect">
@@ -5943,7 +5765,7 @@
         </p:nvSpPr>
         <p:spPr>
           <a:xfrm>
-            <a:off x="685800" y="1325880"/>
+            <a:off x="685800" y="1188720"/>
             <a:ext cx="640080" cy="502920"/>
           </a:xfrm>
           <a:prstGeom prst="rect">
@@ -5978,8 +5800,8 @@
         </p:nvSpPr>
         <p:spPr>
           <a:xfrm>
-            <a:off x="1463040" y="1307592"/>
-            <a:ext cx="9875520" cy="640080"/>
+            <a:off x="1463040" y="1143000"/>
+            <a:ext cx="9875520" cy="685800"/>
           </a:xfrm>
           <a:prstGeom prst="rect">
             <a:avLst/>
@@ -5994,13 +5816,13 @@
           <a:p>
             <a:pPr algn="l"/>
             <a:r>
-              <a:rPr sz="1800" b="0">
+              <a:rPr sz="1600" b="0">
                 <a:solidFill>
                   <a:srgbClr val="FFFFFF"/>
                 </a:solidFill>
                 <a:latin typeface="Calibri"/>
               </a:rPr>
-              <a:t>When a crash sits on the planned road, predictive remaining-time routing cut Dijkstra time by 16%.</a:t>
+              <a:t>Under incident conditions the framework cut Dijkstra travel time by 16.19% (about 599 s versus 728 s), with about one replan per journey.</a:t>
             </a:r>
           </a:p>
         </p:txBody>
@@ -6013,7 +5835,7 @@
         </p:nvSpPr>
         <p:spPr>
           <a:xfrm>
-            <a:off x="457200" y="2286000"/>
+            <a:off x="457200" y="2148840"/>
             <a:ext cx="11247120" cy="1097280"/>
           </a:xfrm>
           <a:prstGeom prst="roundRect">
@@ -6056,7 +5878,7 @@
         </p:nvSpPr>
         <p:spPr>
           <a:xfrm>
-            <a:off x="685800" y="2560320"/>
+            <a:off x="685800" y="2423160"/>
             <a:ext cx="640080" cy="502920"/>
           </a:xfrm>
           <a:prstGeom prst="rect">
@@ -6091,8 +5913,8 @@
         </p:nvSpPr>
         <p:spPr>
           <a:xfrm>
-            <a:off x="1463040" y="2542032"/>
-            <a:ext cx="9875520" cy="640080"/>
+            <a:off x="1463040" y="2377440"/>
+            <a:ext cx="9875520" cy="685800"/>
           </a:xfrm>
           <a:prstGeom prst="rect">
             <a:avLst/>
@@ -6107,13 +5929,13 @@
           <a:p>
             <a:pPr algn="l"/>
             <a:r>
-              <a:rPr sz="1800" b="0">
+              <a:rPr sz="1600" b="0">
                 <a:solidFill>
                   <a:srgbClr val="FFFFFF"/>
                 </a:solidFill>
                 <a:latin typeface="Calibri"/>
               </a:rPr>
-              <a:t>δ in 5–20% did not change travel time. Recommend δ = 0.20 to limit extra alerts.</a:t>
+              <a:t>Travel time did not differ among δ = 0.05–0.20. The operational default is δ = 0.20: the same quality, fewer extra alerts.</a:t>
             </a:r>
           </a:p>
         </p:txBody>
@@ -6126,7 +5948,7 @@
         </p:nvSpPr>
         <p:spPr>
           <a:xfrm>
-            <a:off x="457200" y="3520440"/>
+            <a:off x="457200" y="3383280"/>
             <a:ext cx="11247120" cy="1097280"/>
           </a:xfrm>
           <a:prstGeom prst="roundRect">
@@ -6169,7 +5991,7 @@
         </p:nvSpPr>
         <p:spPr>
           <a:xfrm>
-            <a:off x="685800" y="3794760"/>
+            <a:off x="685800" y="3657600"/>
             <a:ext cx="640080" cy="502920"/>
           </a:xfrm>
           <a:prstGeom prst="rect">
@@ -6204,8 +6026,8 @@
         </p:nvSpPr>
         <p:spPr>
           <a:xfrm>
-            <a:off x="1463040" y="3776472"/>
-            <a:ext cx="9875520" cy="640080"/>
+            <a:off x="1463040" y="3611880"/>
+            <a:ext cx="9875520" cy="685800"/>
           </a:xfrm>
           <a:prstGeom prst="rect">
             <a:avLst/>
@@ -6220,13 +6042,13 @@
           <a:p>
             <a:pPr algn="l"/>
             <a:r>
-              <a:rPr sz="1800" b="0">
+              <a:rPr sz="1600" b="0">
                 <a:solidFill>
                   <a:srgbClr val="FFFFFF"/>
                 </a:solidFill>
                 <a:latin typeface="Calibri"/>
               </a:rPr>
-              <a:t>The dispatcher waits about 40 ms. The constraint is not compute; it is local sensor data.</a:t>
+              <a:t>Combined GRU and routing latency is about 40 ms, well inside the 1,000 ms dispatch cap. The binding constraint is local sensor data, not compute.</a:t>
             </a:r>
           </a:p>
         </p:txBody>
@@ -6239,8 +6061,8 @@
         </p:nvSpPr>
         <p:spPr>
           <a:xfrm>
-            <a:off x="457200" y="4937760"/>
-            <a:ext cx="10972800" cy="457200"/>
+            <a:off x="457200" y="4800600"/>
+            <a:ext cx="11247120" cy="411480"/>
           </a:xfrm>
           <a:prstGeom prst="rect">
             <a:avLst/>
@@ -6274,8 +6096,8 @@
         </p:nvSpPr>
         <p:spPr>
           <a:xfrm>
-            <a:off x="457200" y="5486400"/>
-            <a:ext cx="10972800" cy="365760"/>
+            <a:off x="457200" y="5303520"/>
+            <a:ext cx="11247120" cy="502920"/>
           </a:xfrm>
           <a:prstGeom prst="rect">
             <a:avLst/>
@@ -6290,13 +6112,13 @@
           <a:p>
             <a:pPr algn="ctr"/>
             <a:r>
-              <a:rPr sz="1300" b="0">
+              <a:rPr sz="1400" b="0">
                 <a:solidFill>
                   <a:srgbClr val="A0B0D0"/>
                 </a:solidFill>
                 <a:latin typeface="Calibri"/>
               </a:rPr>
-              <a:t>Results: github.com/Freshia-Njoki/Emergency_Routing  ·  branch cursor/improve-ev-routing-framework-c48b</a:t>
+              <a:t>Freshia Njoki Macharia  ·  PA206/S/25427/24  ·  Kirinyaga University</a:t>
             </a:r>
           </a:p>
         </p:txBody>
@@ -6512,7 +6334,7 @@
                 </a:solidFill>
                 <a:latin typeface="Cambria"/>
               </a:rPr>
-              <a:t>Recap — what was already shown (Obj. 1 &amp; 2)</a:t>
+              <a:t>Problem statement</a:t>
             </a:r>
           </a:p>
         </p:txBody>
@@ -6526,7 +6348,7 @@
         <p:spPr>
           <a:xfrm>
             <a:off x="457200" y="822960"/>
-            <a:ext cx="11247120" cy="1115568"/>
+            <a:ext cx="11247120" cy="1417320"/>
           </a:xfrm>
           <a:prstGeom prst="roundRect">
             <a:avLst/>
@@ -6568,8 +6390,8 @@
         </p:nvSpPr>
         <p:spPr>
           <a:xfrm>
-            <a:off x="685800" y="932688"/>
-            <a:ext cx="10789920" cy="320040"/>
+            <a:off x="685800" y="960120"/>
+            <a:ext cx="10789920" cy="1143000"/>
           </a:xfrm>
           <a:prstGeom prst="rect">
             <a:avLst/>
@@ -6584,61 +6406,26 @@
           <a:p>
             <a:pPr algn="l"/>
             <a:r>
-              <a:rPr sz="1600" b="1">
-                <a:solidFill>
-                  <a:srgbClr val="E8A838"/>
+              <a:rPr sz="1600" b="0">
+                <a:solidFill>
+                  <a:srgbClr val="FFFFFF"/>
                 </a:solidFill>
                 <a:latin typeface="Calibri"/>
               </a:rPr>
-              <a:t>Gap</a:t>
-            </a:r>
-          </a:p>
-        </p:txBody>
-      </p:sp>
-      <p:sp>
-        <p:nvSpPr>
-          <p:cNvPr id="6" name="TextBox 5"/>
-          <p:cNvSpPr txBox="1"/>
-          <p:nvPr/>
-        </p:nvSpPr>
-        <p:spPr>
-          <a:xfrm>
-            <a:off x="685800" y="1261872"/>
-            <a:ext cx="10789920" cy="548640"/>
-          </a:xfrm>
-          <a:prstGeom prst="rect">
-            <a:avLst/>
-          </a:prstGeom>
-          <a:noFill/>
-        </p:spPr>
-        <p:txBody>
-          <a:bodyPr wrap="square">
-            <a:spAutoFit/>
-          </a:bodyPr>
-          <a:lstStyle/>
-          <a:p>
-            <a:pPr algn="l"/>
-            <a:r>
-              <a:rPr sz="1600" b="0">
-                <a:solidFill>
-                  <a:srgbClr val="FFFFFF"/>
-                </a:solidFill>
-                <a:latin typeface="Calibri"/>
-              </a:rPr>
-              <a:t>No emergency loop joined a learned speed model, time-dependent search, and a tested remaining-time trigger.</a:t>
-            </a:r>
-          </a:p>
-        </p:txBody>
-      </p:sp>
-      <p:sp>
-        <p:nvSpPr>
-          <p:cNvPr id="7" name="Rounded Rectangle 6"/>
+              <a:t>Emergency vehicles lose time in congestion when dispatch uses a current-map shortest path. That path is optimal only for the speeds observed at departure. It does not anticipate a jam forming 15–30 minutes ahead on the planned corridor.</a:t>
+            </a:r>
+          </a:p>
+        </p:txBody>
+      </p:sp>
+      <p:sp>
+        <p:nvSpPr>
+          <p:cNvPr id="6" name="Rounded Rectangle 5"/>
           <p:cNvSpPr/>
           <p:nvPr/>
         </p:nvSpPr>
         <p:spPr>
           <a:xfrm>
-            <a:off x="457200" y="2057400"/>
+            <a:off x="457200" y="2423160"/>
             <a:ext cx="11247120" cy="1115568"/>
           </a:xfrm>
           <a:prstGeom prst="roundRect">
@@ -6675,14 +6462,14 @@
       </p:sp>
       <p:sp>
         <p:nvSpPr>
-          <p:cNvPr id="8" name="TextBox 7"/>
+          <p:cNvPr id="7" name="TextBox 6"/>
           <p:cNvSpPr txBox="1"/>
           <p:nvPr/>
         </p:nvSpPr>
         <p:spPr>
           <a:xfrm>
-            <a:off x="685800" y="2167128"/>
-            <a:ext cx="10789920" cy="320040"/>
+            <a:off x="685800" y="2532888"/>
+            <a:ext cx="10789920" cy="292608"/>
           </a:xfrm>
           <a:prstGeom prst="rect">
             <a:avLst/>
@@ -6703,21 +6490,21 @@
                 </a:solidFill>
                 <a:latin typeface="Calibri"/>
               </a:rPr>
-              <a:t>Artefact</a:t>
-            </a:r>
-          </a:p>
-        </p:txBody>
-      </p:sp>
-      <p:sp>
-        <p:nvSpPr>
-          <p:cNvPr id="9" name="TextBox 8"/>
+              <a:t>Practice</a:t>
+            </a:r>
+          </a:p>
+        </p:txBody>
+      </p:sp>
+      <p:sp>
+        <p:nvSpPr>
+          <p:cNvPr id="8" name="TextBox 7"/>
           <p:cNvSpPr txBox="1"/>
           <p:nvPr/>
         </p:nvSpPr>
         <p:spPr>
           <a:xfrm>
-            <a:off x="685800" y="2496312"/>
-            <a:ext cx="10789920" cy="548640"/>
+            <a:off x="685800" y="2843784"/>
+            <a:ext cx="10789920" cy="594360"/>
           </a:xfrm>
           <a:prstGeom prst="rect">
             <a:avLst/>
@@ -6732,26 +6519,26 @@
           <a:p>
             <a:pPr algn="l"/>
             <a:r>
-              <a:rPr sz="1600" b="0">
+              <a:rPr sz="1500" b="0">
                 <a:solidFill>
                   <a:srgbClr val="FFFFFF"/>
                 </a:solidFill>
                 <a:latin typeface="Calibri"/>
               </a:rPr>
-              <a:t>Two-layer GRU (64 units, dropout 0.2) + TD-A* + δ-controller. Dispatcher keeps final authority.</a:t>
-            </a:r>
-          </a:p>
-        </p:txBody>
-      </p:sp>
-      <p:sp>
-        <p:nvSpPr>
-          <p:cNvPr id="10" name="Rounded Rectangle 9"/>
+              <a:t>Dijkstra (or equivalent) on the snapshot available at dispatch.</a:t>
+            </a:r>
+          </a:p>
+        </p:txBody>
+      </p:sp>
+      <p:sp>
+        <p:nvSpPr>
+          <p:cNvPr id="9" name="Rounded Rectangle 8"/>
           <p:cNvSpPr/>
           <p:nvPr/>
         </p:nvSpPr>
         <p:spPr>
           <a:xfrm>
-            <a:off x="457200" y="3291840"/>
+            <a:off x="457200" y="3657600"/>
             <a:ext cx="11247120" cy="1115568"/>
           </a:xfrm>
           <a:prstGeom prst="roundRect">
@@ -6788,14 +6575,14 @@
       </p:sp>
       <p:sp>
         <p:nvSpPr>
-          <p:cNvPr id="11" name="TextBox 10"/>
+          <p:cNvPr id="10" name="TextBox 9"/>
           <p:cNvSpPr txBox="1"/>
           <p:nvPr/>
         </p:nvSpPr>
         <p:spPr>
           <a:xfrm>
-            <a:off x="685800" y="3401568"/>
-            <a:ext cx="10789920" cy="320040"/>
+            <a:off x="685800" y="3767328"/>
+            <a:ext cx="10789920" cy="292608"/>
           </a:xfrm>
           <a:prstGeom prst="rect">
             <a:avLst/>
@@ -6816,21 +6603,21 @@
                 </a:solidFill>
                 <a:latin typeface="Calibri"/>
               </a:rPr>
-              <a:t>Prediction</a:t>
-            </a:r>
-          </a:p>
-        </p:txBody>
-      </p:sp>
-      <p:sp>
-        <p:nvSpPr>
-          <p:cNvPr id="12" name="TextBox 11"/>
+              <a:t>Literature</a:t>
+            </a:r>
+          </a:p>
+        </p:txBody>
+      </p:sp>
+      <p:sp>
+        <p:nvSpPr>
+          <p:cNvPr id="11" name="TextBox 10"/>
           <p:cNvSpPr txBox="1"/>
           <p:nvPr/>
         </p:nvSpPr>
         <p:spPr>
           <a:xfrm>
-            <a:off x="685800" y="3730752"/>
-            <a:ext cx="10789920" cy="548640"/>
+            <a:off x="685800" y="4078224"/>
+            <a:ext cx="10789920" cy="594360"/>
           </a:xfrm>
           <a:prstGeom prst="rect">
             <a:avLst/>
@@ -6845,26 +6632,26 @@
           <a:p>
             <a:pPr algn="l"/>
             <a:r>
-              <a:rPr sz="1600" b="0">
+              <a:rPr sz="1500" b="0">
                 <a:solidFill>
                   <a:srgbClr val="FFFFFF"/>
                 </a:solidFill>
                 <a:latin typeface="Calibri"/>
               </a:rPr>
-              <a:t>METR-LA MAE 3.48 mph (27 epochs). Separate PEMS-BAY GRU MAE 2.38 mph. Not one joint model.</a:t>
-            </a:r>
-          </a:p>
-        </p:txBody>
-      </p:sp>
-      <p:sp>
-        <p:nvSpPr>
-          <p:cNvPr id="13" name="Rounded Rectangle 12"/>
+              <a:t>Strong speed predictors and strong time-dependent routers usually sit in separate papers. Few emergency loops join a learned forecast, time-dependent search, and a tested remaining-time trigger under one second.</a:t>
+            </a:r>
+          </a:p>
+        </p:txBody>
+      </p:sp>
+      <p:sp>
+        <p:nvSpPr>
+          <p:cNvPr id="12" name="Rounded Rectangle 11"/>
           <p:cNvSpPr/>
           <p:nvPr/>
         </p:nvSpPr>
         <p:spPr>
           <a:xfrm>
-            <a:off x="457200" y="4526280"/>
+            <a:off x="457200" y="4892040"/>
             <a:ext cx="11247120" cy="1115568"/>
           </a:xfrm>
           <a:prstGeom prst="roundRect">
@@ -6901,14 +6688,14 @@
       </p:sp>
       <p:sp>
         <p:nvSpPr>
-          <p:cNvPr id="14" name="TextBox 13"/>
+          <p:cNvPr id="13" name="TextBox 12"/>
           <p:cNvSpPr txBox="1"/>
           <p:nvPr/>
         </p:nvSpPr>
         <p:spPr>
           <a:xfrm>
-            <a:off x="685800" y="4636008"/>
-            <a:ext cx="10789920" cy="320040"/>
+            <a:off x="685800" y="5001768"/>
+            <a:ext cx="10789920" cy="292608"/>
           </a:xfrm>
           <a:prstGeom prst="rect">
             <a:avLst/>
@@ -6929,21 +6716,21 @@
                 </a:solidFill>
                 <a:latin typeface="Calibri"/>
               </a:rPr>
-              <a:t>Graph</a:t>
-            </a:r>
-          </a:p>
-        </p:txBody>
-      </p:sp>
-      <p:sp>
-        <p:nvSpPr>
-          <p:cNvPr id="15" name="TextBox 14"/>
+              <a:t>Motivation</a:t>
+            </a:r>
+          </a:p>
+        </p:txBody>
+      </p:sp>
+      <p:sp>
+        <p:nvSpPr>
+          <p:cNvPr id="14" name="TextBox 13"/>
           <p:cNvSpPr txBox="1"/>
           <p:nvPr/>
         </p:nvSpPr>
         <p:spPr>
           <a:xfrm>
-            <a:off x="685800" y="4965192"/>
-            <a:ext cx="10789920" cy="548640"/>
+            <a:off x="685800" y="5312664"/>
+            <a:ext cx="10789920" cy="594360"/>
           </a:xfrm>
           <a:prstGeom prst="rect">
             <a:avLst/>
@@ -6958,20 +6745,20 @@
           <a:p>
             <a:pPr algn="l"/>
             <a:r>
-              <a:rPr sz="1600" b="0">
+              <a:rPr sz="1500" b="0">
                 <a:solidFill>
                   <a:srgbClr val="FFFFFF"/>
                 </a:solidFill>
                 <a:latin typeface="Calibri"/>
               </a:rPr>
-              <a:t>Routing uses 207 detector nodes and 1,515 fully instrumented edges — not the old 397-node OSM map.</a:t>
-            </a:r>
-          </a:p>
-        </p:txBody>
-      </p:sp>
-      <p:sp>
-        <p:nvSpPr>
-          <p:cNvPr id="16" name="Rectangle 15"/>
+              <a:t>Kenyan EMS delay and sparse roadside sensing motivate the work. This study is a proof of concept on United States freeway detectors; it is not a Nairobi field trial.</a:t>
+            </a:r>
+          </a:p>
+        </p:txBody>
+      </p:sp>
+      <p:sp>
+        <p:nvSpPr>
+          <p:cNvPr id="15" name="Rectangle 14"/>
           <p:cNvSpPr/>
           <p:nvPr/>
         </p:nvSpPr>
@@ -7014,7 +6801,7 @@
       </p:sp>
       <p:sp>
         <p:nvSpPr>
-          <p:cNvPr id="17" name="TextBox 16"/>
+          <p:cNvPr id="16" name="TextBox 15"/>
           <p:cNvSpPr txBox="1"/>
           <p:nvPr/>
         </p:nvSpPr>
@@ -7048,7 +6835,7 @@
       </p:sp>
       <p:sp>
         <p:nvSpPr>
-          <p:cNvPr id="18" name="TextBox 17"/>
+          <p:cNvPr id="17" name="TextBox 16"/>
           <p:cNvSpPr txBox="1"/>
           <p:nvPr/>
         </p:nvSpPr>
@@ -7159,7 +6946,7 @@
         <p:spPr>
           <a:xfrm>
             <a:off x="457200" y="256032"/>
-            <a:ext cx="10972800" cy="411480"/>
+            <a:ext cx="10972800" cy="365760"/>
           </a:xfrm>
           <a:prstGeom prst="rect">
             <a:avLst/>
@@ -7180,7 +6967,7 @@
                 </a:solidFill>
                 <a:latin typeface="Cambria"/>
               </a:rPr>
-              <a:t>What was measured — 900 matched journeys</a:t>
+              <a:t>Purpose, questions, and objectives</a:t>
             </a:r>
           </a:p>
         </p:txBody>
@@ -7193,8 +6980,8 @@
         </p:nvSpPr>
         <p:spPr>
           <a:xfrm>
-            <a:off x="411480" y="868680"/>
-            <a:ext cx="2743200" cy="1965960"/>
+            <a:off x="457200" y="731520"/>
+            <a:ext cx="11247120" cy="1143000"/>
           </a:xfrm>
           <a:prstGeom prst="roundRect">
             <a:avLst/>
@@ -7236,8 +7023,8 @@
         </p:nvSpPr>
         <p:spPr>
           <a:xfrm>
-            <a:off x="411480" y="1005840"/>
-            <a:ext cx="2743200" cy="640080"/>
+            <a:off x="685800" y="841248"/>
+            <a:ext cx="10789920" cy="256032"/>
           </a:xfrm>
           <a:prstGeom prst="rect">
             <a:avLst/>
@@ -7250,15 +7037,15 @@
           </a:bodyPr>
           <a:lstStyle/>
           <a:p>
-            <a:pPr algn="ctr"/>
-            <a:r>
-              <a:rPr sz="3600" b="1">
+            <a:pPr algn="l"/>
+            <a:r>
+              <a:rPr sz="1400" b="1">
                 <a:solidFill>
                   <a:srgbClr val="E8A838"/>
                 </a:solidFill>
-                <a:latin typeface="Cambria"/>
-              </a:rPr>
-              <a:t>75</a:t>
+                <a:latin typeface="Calibri"/>
+              </a:rPr>
+              <a:t>Purpose</a:t>
             </a:r>
           </a:p>
         </p:txBody>
@@ -7271,8 +7058,8 @@
         </p:nvSpPr>
         <p:spPr>
           <a:xfrm>
-            <a:off x="502920" y="1737360"/>
-            <a:ext cx="2560320" cy="868680"/>
+            <a:off x="685800" y="1115568"/>
+            <a:ext cx="10789920" cy="640080"/>
           </a:xfrm>
           <a:prstGeom prst="rect">
             <a:avLst/>
@@ -7285,7 +7072,77 @@
           </a:bodyPr>
           <a:lstStyle/>
           <a:p>
-            <a:pPr algn="ctr"/>
+            <a:pPr algn="l"/>
+            <a:r>
+              <a:rPr sz="1500" b="0">
+                <a:solidFill>
+                  <a:srgbClr val="FFFFFF"/>
+                </a:solidFill>
+                <a:latin typeface="Calibri"/>
+              </a:rPr>
+              <a:t>To reduce emergency-vehicle travel time under congestion by combining short-horizon GRU speed forecasts with time-dependent A* and a remaining-time replanning threshold, as dispatcher support.</a:t>
+            </a:r>
+          </a:p>
+        </p:txBody>
+      </p:sp>
+      <p:sp>
+        <p:nvSpPr>
+          <p:cNvPr id="7" name="TextBox 6"/>
+          <p:cNvSpPr txBox="1"/>
+          <p:nvPr/>
+        </p:nvSpPr>
+        <p:spPr>
+          <a:xfrm>
+            <a:off x="502920" y="2011680"/>
+            <a:ext cx="1005840" cy="411480"/>
+          </a:xfrm>
+          <a:prstGeom prst="rect">
+            <a:avLst/>
+          </a:prstGeom>
+          <a:noFill/>
+        </p:spPr>
+        <p:txBody>
+          <a:bodyPr wrap="square">
+            <a:spAutoFit/>
+          </a:bodyPr>
+          <a:lstStyle/>
+          <a:p>
+            <a:pPr algn="l"/>
+            <a:r>
+              <a:rPr sz="1400" b="1">
+                <a:solidFill>
+                  <a:srgbClr val="E8A838"/>
+                </a:solidFill>
+                <a:latin typeface="Calibri"/>
+              </a:rPr>
+              <a:t>RQ1</a:t>
+            </a:r>
+          </a:p>
+        </p:txBody>
+      </p:sp>
+      <p:sp>
+        <p:nvSpPr>
+          <p:cNvPr id="8" name="TextBox 7"/>
+          <p:cNvSpPr txBox="1"/>
+          <p:nvPr/>
+        </p:nvSpPr>
+        <p:spPr>
+          <a:xfrm>
+            <a:off x="1554480" y="2011680"/>
+            <a:ext cx="10058400" cy="457200"/>
+          </a:xfrm>
+          <a:prstGeom prst="rect">
+            <a:avLst/>
+          </a:prstGeom>
+          <a:noFill/>
+        </p:spPr>
+        <p:txBody>
+          <a:bodyPr wrap="square">
+            <a:spAutoFit/>
+          </a:bodyPr>
+          <a:lstStyle/>
+          <a:p>
+            <a:pPr algn="l"/>
             <a:r>
               <a:rPr sz="1400" b="0">
                 <a:solidFill>
@@ -7293,22 +7150,266 @@
                 </a:solidFill>
                 <a:latin typeface="Calibri"/>
               </a:rPr>
-              <a:t>origin–destination
-pairs (seed 42)</a:t>
-            </a:r>
-          </a:p>
-        </p:txBody>
-      </p:sp>
-      <p:sp>
-        <p:nvSpPr>
-          <p:cNvPr id="7" name="Rounded Rectangle 6"/>
+              <a:t>What gaps remain among EV routing, traffic prediction, and time-dependent pathfinding?</a:t>
+            </a:r>
+          </a:p>
+        </p:txBody>
+      </p:sp>
+      <p:sp>
+        <p:nvSpPr>
+          <p:cNvPr id="9" name="TextBox 8"/>
+          <p:cNvSpPr txBox="1"/>
+          <p:nvPr/>
+        </p:nvSpPr>
+        <p:spPr>
+          <a:xfrm>
+            <a:off x="502920" y="2514600"/>
+            <a:ext cx="1005840" cy="411480"/>
+          </a:xfrm>
+          <a:prstGeom prst="rect">
+            <a:avLst/>
+          </a:prstGeom>
+          <a:noFill/>
+        </p:spPr>
+        <p:txBody>
+          <a:bodyPr wrap="square">
+            <a:spAutoFit/>
+          </a:bodyPr>
+          <a:lstStyle/>
+          <a:p>
+            <a:pPr algn="l"/>
+            <a:r>
+              <a:rPr sz="1400" b="1">
+                <a:solidFill>
+                  <a:srgbClr val="E8A838"/>
+                </a:solidFill>
+                <a:latin typeface="Calibri"/>
+              </a:rPr>
+              <a:t>RQ2</a:t>
+            </a:r>
+          </a:p>
+        </p:txBody>
+      </p:sp>
+      <p:sp>
+        <p:nvSpPr>
+          <p:cNvPr id="10" name="TextBox 9"/>
+          <p:cNvSpPr txBox="1"/>
+          <p:nvPr/>
+        </p:nvSpPr>
+        <p:spPr>
+          <a:xfrm>
+            <a:off x="1554480" y="2514600"/>
+            <a:ext cx="10058400" cy="457200"/>
+          </a:xfrm>
+          <a:prstGeom prst="rect">
+            <a:avLst/>
+          </a:prstGeom>
+          <a:noFill/>
+        </p:spPr>
+        <p:txBody>
+          <a:bodyPr wrap="square">
+            <a:spAutoFit/>
+          </a:bodyPr>
+          <a:lstStyle/>
+          <a:p>
+            <a:pPr algn="l"/>
+            <a:r>
+              <a:rPr sz="1400" b="0">
+                <a:solidFill>
+                  <a:srgbClr val="FFFFFF"/>
+                </a:solidFill>
+                <a:latin typeface="Calibri"/>
+              </a:rPr>
+              <a:t>How accurately can a lightweight GRU forecast 15–30 minute speeds on loop-detector traces?</a:t>
+            </a:r>
+          </a:p>
+        </p:txBody>
+      </p:sp>
+      <p:sp>
+        <p:nvSpPr>
+          <p:cNvPr id="11" name="TextBox 10"/>
+          <p:cNvSpPr txBox="1"/>
+          <p:nvPr/>
+        </p:nvSpPr>
+        <p:spPr>
+          <a:xfrm>
+            <a:off x="502920" y="3017520"/>
+            <a:ext cx="1005840" cy="411480"/>
+          </a:xfrm>
+          <a:prstGeom prst="rect">
+            <a:avLst/>
+          </a:prstGeom>
+          <a:noFill/>
+        </p:spPr>
+        <p:txBody>
+          <a:bodyPr wrap="square">
+            <a:spAutoFit/>
+          </a:bodyPr>
+          <a:lstStyle/>
+          <a:p>
+            <a:pPr algn="l"/>
+            <a:r>
+              <a:rPr sz="1400" b="1">
+                <a:solidFill>
+                  <a:srgbClr val="E8A838"/>
+                </a:solidFill>
+                <a:latin typeface="Calibri"/>
+              </a:rPr>
+              <a:t>RQ3</a:t>
+            </a:r>
+          </a:p>
+        </p:txBody>
+      </p:sp>
+      <p:sp>
+        <p:nvSpPr>
+          <p:cNvPr id="12" name="TextBox 11"/>
+          <p:cNvSpPr txBox="1"/>
+          <p:nvPr/>
+        </p:nvSpPr>
+        <p:spPr>
+          <a:xfrm>
+            <a:off x="1554480" y="3017520"/>
+            <a:ext cx="10058400" cy="457200"/>
+          </a:xfrm>
+          <a:prstGeom prst="rect">
+            <a:avLst/>
+          </a:prstGeom>
+          <a:noFill/>
+        </p:spPr>
+        <p:txBody>
+          <a:bodyPr wrap="square">
+            <a:spAutoFit/>
+          </a:bodyPr>
+          <a:lstStyle/>
+          <a:p>
+            <a:pPr algn="l"/>
+            <a:r>
+              <a:rPr sz="1400" b="0">
+                <a:solidFill>
+                  <a:srgbClr val="FFFFFF"/>
+                </a:solidFill>
+                <a:latin typeface="Calibri"/>
+              </a:rPr>
+              <a:t>Which remaining-time threshold δ balances route quality against extra dispatcher alerts?</a:t>
+            </a:r>
+          </a:p>
+        </p:txBody>
+      </p:sp>
+      <p:sp>
+        <p:nvSpPr>
+          <p:cNvPr id="13" name="TextBox 12"/>
+          <p:cNvSpPr txBox="1"/>
+          <p:nvPr/>
+        </p:nvSpPr>
+        <p:spPr>
+          <a:xfrm>
+            <a:off x="502920" y="3520440"/>
+            <a:ext cx="1005840" cy="411480"/>
+          </a:xfrm>
+          <a:prstGeom prst="rect">
+            <a:avLst/>
+          </a:prstGeom>
+          <a:noFill/>
+        </p:spPr>
+        <p:txBody>
+          <a:bodyPr wrap="square">
+            <a:spAutoFit/>
+          </a:bodyPr>
+          <a:lstStyle/>
+          <a:p>
+            <a:pPr algn="l"/>
+            <a:r>
+              <a:rPr sz="1400" b="1">
+                <a:solidFill>
+                  <a:srgbClr val="E8A838"/>
+                </a:solidFill>
+                <a:latin typeface="Calibri"/>
+              </a:rPr>
+              <a:t>RQ4</a:t>
+            </a:r>
+          </a:p>
+        </p:txBody>
+      </p:sp>
+      <p:sp>
+        <p:nvSpPr>
+          <p:cNvPr id="14" name="TextBox 13"/>
+          <p:cNvSpPr txBox="1"/>
+          <p:nvPr/>
+        </p:nvSpPr>
+        <p:spPr>
+          <a:xfrm>
+            <a:off x="1554480" y="3520440"/>
+            <a:ext cx="10058400" cy="457200"/>
+          </a:xfrm>
+          <a:prstGeom prst="rect">
+            <a:avLst/>
+          </a:prstGeom>
+          <a:noFill/>
+        </p:spPr>
+        <p:txBody>
+          <a:bodyPr wrap="square">
+            <a:spAutoFit/>
+          </a:bodyPr>
+          <a:lstStyle/>
+          <a:p>
+            <a:pPr algn="l"/>
+            <a:r>
+              <a:rPr sz="1400" b="0">
+                <a:solidFill>
+                  <a:srgbClr val="FFFFFF"/>
+                </a:solidFill>
+                <a:latin typeface="Calibri"/>
+              </a:rPr>
+              <a:t>Does the integrated loop cut realised travel time versus baselines while staying under 1 s?</a:t>
+            </a:r>
+          </a:p>
+        </p:txBody>
+      </p:sp>
+      <p:sp>
+        <p:nvSpPr>
+          <p:cNvPr id="15" name="TextBox 14"/>
+          <p:cNvSpPr txBox="1"/>
+          <p:nvPr/>
+        </p:nvSpPr>
+        <p:spPr>
+          <a:xfrm>
+            <a:off x="457200" y="4069080"/>
+            <a:ext cx="11247120" cy="274320"/>
+          </a:xfrm>
+          <a:prstGeom prst="rect">
+            <a:avLst/>
+          </a:prstGeom>
+          <a:noFill/>
+        </p:spPr>
+        <p:txBody>
+          <a:bodyPr wrap="square">
+            <a:spAutoFit/>
+          </a:bodyPr>
+          <a:lstStyle/>
+          <a:p>
+            <a:pPr algn="l"/>
+            <a:r>
+              <a:rPr sz="1300" b="0">
+                <a:solidFill>
+                  <a:srgbClr val="CADCFC"/>
+                </a:solidFill>
+                <a:latin typeface="Calibri"/>
+              </a:rPr>
+              <a:t>Objectives  —  Obj. 1 design the GRU  ·  Obj. 2 train and validate  ·  Obj. 3 integrate TD-A* and test δ  ·  Obj. 4 evaluate travel time and latency</a:t>
+            </a:r>
+          </a:p>
+        </p:txBody>
+      </p:sp>
+      <p:sp>
+        <p:nvSpPr>
+          <p:cNvPr id="16" name="Rounded Rectangle 15"/>
           <p:cNvSpPr/>
           <p:nvPr/>
         </p:nvSpPr>
         <p:spPr>
           <a:xfrm>
-            <a:off x="3337560" y="868680"/>
-            <a:ext cx="2743200" cy="1965960"/>
+            <a:off x="457200" y="4480560"/>
+            <a:ext cx="11247120" cy="1371600"/>
           </a:xfrm>
           <a:prstGeom prst="roundRect">
             <a:avLst/>
@@ -7344,14 +7445,14 @@
       </p:sp>
       <p:sp>
         <p:nvSpPr>
-          <p:cNvPr id="8" name="TextBox 7"/>
+          <p:cNvPr id="17" name="TextBox 16"/>
           <p:cNvSpPr txBox="1"/>
           <p:nvPr/>
         </p:nvSpPr>
         <p:spPr>
           <a:xfrm>
-            <a:off x="3337560" y="1005840"/>
-            <a:ext cx="2743200" cy="640080"/>
+            <a:off x="685800" y="4617720"/>
+            <a:ext cx="10789920" cy="256032"/>
           </a:xfrm>
           <a:prstGeom prst="rect">
             <a:avLst/>
@@ -7364,29 +7465,29 @@
           </a:bodyPr>
           <a:lstStyle/>
           <a:p>
-            <a:pPr algn="ctr"/>
-            <a:r>
-              <a:rPr sz="3600" b="1">
+            <a:pPr algn="l"/>
+            <a:r>
+              <a:rPr sz="1400" b="1">
                 <a:solidFill>
                   <a:srgbClr val="E8A838"/>
                 </a:solidFill>
-                <a:latin typeface="Cambria"/>
-              </a:rPr>
-              <a:t>3</a:t>
-            </a:r>
-          </a:p>
-        </p:txBody>
-      </p:sp>
-      <p:sp>
-        <p:nvSpPr>
-          <p:cNvPr id="9" name="TextBox 8"/>
+                <a:latin typeface="Calibri"/>
+              </a:rPr>
+              <a:t>Scope of this seminar</a:t>
+            </a:r>
+          </a:p>
+        </p:txBody>
+      </p:sp>
+      <p:sp>
+        <p:nvSpPr>
+          <p:cNvPr id="18" name="TextBox 17"/>
           <p:cNvSpPr txBox="1"/>
           <p:nvPr/>
         </p:nvSpPr>
         <p:spPr>
           <a:xfrm>
-            <a:off x="3429000" y="1737360"/>
-            <a:ext cx="2560320" cy="868680"/>
+            <a:off x="685800" y="4937760"/>
+            <a:ext cx="10789920" cy="731520"/>
           </a:xfrm>
           <a:prstGeom prst="rect">
             <a:avLst/>
@@ -7399,742 +7500,22 @@
           </a:bodyPr>
           <a:lstStyle/>
           <a:p>
-            <a:pPr algn="ctr"/>
-            <a:r>
-              <a:rPr sz="1400" b="0">
+            <a:pPr algn="l"/>
+            <a:r>
+              <a:rPr sz="1500" b="0">
                 <a:solidFill>
                   <a:srgbClr val="FFFFFF"/>
                 </a:solidFill>
                 <a:latin typeface="Calibri"/>
               </a:rPr>
-              <a:t>scenarios: peak,
-off-peak, incident</a:t>
-            </a:r>
-          </a:p>
-        </p:txBody>
-      </p:sp>
-      <p:sp>
-        <p:nvSpPr>
-          <p:cNvPr id="10" name="Rounded Rectangle 9"/>
-          <p:cNvSpPr/>
-          <p:nvPr/>
-        </p:nvSpPr>
-        <p:spPr>
-          <a:xfrm>
-            <a:off x="6263640" y="868680"/>
-            <a:ext cx="2743200" cy="1965960"/>
-          </a:xfrm>
-          <a:prstGeom prst="roundRect">
-            <a:avLst/>
-          </a:prstGeom>
-          <a:solidFill>
-            <a:srgbClr val="2A357A"/>
-          </a:solidFill>
-          <a:ln>
-            <a:noFill/>
-          </a:ln>
-        </p:spPr>
-        <p:style>
-          <a:lnRef idx="1">
-            <a:schemeClr val="accent1"/>
-          </a:lnRef>
-          <a:fillRef idx="3">
-            <a:schemeClr val="accent1"/>
-          </a:fillRef>
-          <a:effectRef idx="2">
-            <a:schemeClr val="accent1"/>
-          </a:effectRef>
-          <a:fontRef idx="minor">
-            <a:schemeClr val="lt1"/>
-          </a:fontRef>
-        </p:style>
-        <p:txBody>
-          <a:bodyPr rtlCol="0" anchor="ctr"/>
-          <a:lstStyle/>
-          <a:p>
-            <a:pPr algn="ctr"/>
-          </a:p>
-        </p:txBody>
-      </p:sp>
-      <p:sp>
-        <p:nvSpPr>
-          <p:cNvPr id="11" name="TextBox 10"/>
-          <p:cNvSpPr txBox="1"/>
-          <p:nvPr/>
-        </p:nvSpPr>
-        <p:spPr>
-          <a:xfrm>
-            <a:off x="6263640" y="1005840"/>
-            <a:ext cx="2743200" cy="640080"/>
-          </a:xfrm>
-          <a:prstGeom prst="rect">
-            <a:avLst/>
-          </a:prstGeom>
-          <a:noFill/>
-        </p:spPr>
-        <p:txBody>
-          <a:bodyPr wrap="square">
-            <a:spAutoFit/>
-          </a:bodyPr>
-          <a:lstStyle/>
-          <a:p>
-            <a:pPr algn="ctr"/>
-            <a:r>
-              <a:rPr sz="3600" b="1">
-                <a:solidFill>
-                  <a:srgbClr val="E8A838"/>
-                </a:solidFill>
-                <a:latin typeface="Cambria"/>
-              </a:rPr>
-              <a:t>4</a:t>
-            </a:r>
-          </a:p>
-        </p:txBody>
-      </p:sp>
-      <p:sp>
-        <p:nvSpPr>
-          <p:cNvPr id="12" name="TextBox 11"/>
-          <p:cNvSpPr txBox="1"/>
-          <p:nvPr/>
-        </p:nvSpPr>
-        <p:spPr>
-          <a:xfrm>
-            <a:off x="6355080" y="1737360"/>
-            <a:ext cx="2560320" cy="868680"/>
-          </a:xfrm>
-          <a:prstGeom prst="rect">
-            <a:avLst/>
-          </a:prstGeom>
-          <a:noFill/>
-        </p:spPr>
-        <p:txBody>
-          <a:bodyPr wrap="square">
-            <a:spAutoFit/>
-          </a:bodyPr>
-          <a:lstStyle/>
-          <a:p>
-            <a:pPr algn="ctr"/>
-            <a:r>
-              <a:rPr sz="1400" b="0">
-                <a:solidFill>
-                  <a:srgbClr val="FFFFFF"/>
-                </a:solidFill>
-                <a:latin typeface="Calibri"/>
-              </a:rPr>
-              <a:t>δ values:
-5, 10, 15, 20%</a:t>
-            </a:r>
-          </a:p>
-        </p:txBody>
-      </p:sp>
-      <p:sp>
-        <p:nvSpPr>
-          <p:cNvPr id="13" name="Rounded Rectangle 12"/>
-          <p:cNvSpPr/>
-          <p:nvPr/>
-        </p:nvSpPr>
-        <p:spPr>
-          <a:xfrm>
-            <a:off x="9189720" y="868680"/>
-            <a:ext cx="2743200" cy="1965960"/>
-          </a:xfrm>
-          <a:prstGeom prst="roundRect">
-            <a:avLst/>
-          </a:prstGeom>
-          <a:solidFill>
-            <a:srgbClr val="2A357A"/>
-          </a:solidFill>
-          <a:ln>
-            <a:noFill/>
-          </a:ln>
-        </p:spPr>
-        <p:style>
-          <a:lnRef idx="1">
-            <a:schemeClr val="accent1"/>
-          </a:lnRef>
-          <a:fillRef idx="3">
-            <a:schemeClr val="accent1"/>
-          </a:fillRef>
-          <a:effectRef idx="2">
-            <a:schemeClr val="accent1"/>
-          </a:effectRef>
-          <a:fontRef idx="minor">
-            <a:schemeClr val="lt1"/>
-          </a:fontRef>
-        </p:style>
-        <p:txBody>
-          <a:bodyPr rtlCol="0" anchor="ctr"/>
-          <a:lstStyle/>
-          <a:p>
-            <a:pPr algn="ctr"/>
-          </a:p>
-        </p:txBody>
-      </p:sp>
-      <p:sp>
-        <p:nvSpPr>
-          <p:cNvPr id="14" name="TextBox 13"/>
-          <p:cNvSpPr txBox="1"/>
-          <p:nvPr/>
-        </p:nvSpPr>
-        <p:spPr>
-          <a:xfrm>
-            <a:off x="9189720" y="1005840"/>
-            <a:ext cx="2743200" cy="640080"/>
-          </a:xfrm>
-          <a:prstGeom prst="rect">
-            <a:avLst/>
-          </a:prstGeom>
-          <a:noFill/>
-        </p:spPr>
-        <p:txBody>
-          <a:bodyPr wrap="square">
-            <a:spAutoFit/>
-          </a:bodyPr>
-          <a:lstStyle/>
-          <a:p>
-            <a:pPr algn="ctr"/>
-            <a:r>
-              <a:rPr sz="3600" b="1">
-                <a:solidFill>
-                  <a:srgbClr val="E8A838"/>
-                </a:solidFill>
-                <a:latin typeface="Cambria"/>
-              </a:rPr>
-              <a:t>900</a:t>
-            </a:r>
-          </a:p>
-        </p:txBody>
-      </p:sp>
-      <p:sp>
-        <p:nvSpPr>
-          <p:cNvPr id="15" name="TextBox 14"/>
-          <p:cNvSpPr txBox="1"/>
-          <p:nvPr/>
-        </p:nvSpPr>
-        <p:spPr>
-          <a:xfrm>
-            <a:off x="9281160" y="1737360"/>
-            <a:ext cx="2560320" cy="868680"/>
-          </a:xfrm>
-          <a:prstGeom prst="rect">
-            <a:avLst/>
-          </a:prstGeom>
-          <a:noFill/>
-        </p:spPr>
-        <p:txBody>
-          <a:bodyPr wrap="square">
-            <a:spAutoFit/>
-          </a:bodyPr>
-          <a:lstStyle/>
-          <a:p>
-            <a:pPr algn="ctr"/>
-            <a:r>
-              <a:rPr sz="1400" b="0">
-                <a:solidFill>
-                  <a:srgbClr val="FFFFFF"/>
-                </a:solidFill>
-                <a:latin typeface="Calibri"/>
-              </a:rPr>
-              <a:t>ground-truth
-walks of every method</a:t>
-            </a:r>
-          </a:p>
-        </p:txBody>
-      </p:sp>
-      <p:sp>
-        <p:nvSpPr>
-          <p:cNvPr id="16" name="TextBox 15"/>
-          <p:cNvSpPr txBox="1"/>
-          <p:nvPr/>
-        </p:nvSpPr>
-        <p:spPr>
-          <a:xfrm>
-            <a:off x="457200" y="3017520"/>
-            <a:ext cx="10972800" cy="320040"/>
-          </a:xfrm>
-          <a:prstGeom prst="rect">
-            <a:avLst/>
-          </a:prstGeom>
-          <a:noFill/>
-        </p:spPr>
-        <p:txBody>
-          <a:bodyPr wrap="square">
-            <a:spAutoFit/>
-          </a:bodyPr>
-          <a:lstStyle/>
-          <a:p>
-            <a:pPr algn="l"/>
-            <a:r>
-              <a:rPr sz="1600" b="1">
-                <a:solidFill>
-                  <a:srgbClr val="CADCFC"/>
-                </a:solidFill>
-                <a:latin typeface="Calibri"/>
-              </a:rPr>
-              <a:t>Four baselines (same clock, same realised speeds)</a:t>
-            </a:r>
-          </a:p>
-        </p:txBody>
-      </p:sp>
-      <p:sp>
-        <p:nvSpPr>
-          <p:cNvPr id="17" name="Rounded Rectangle 16"/>
-          <p:cNvSpPr/>
-          <p:nvPr/>
-        </p:nvSpPr>
-        <p:spPr>
-          <a:xfrm>
-            <a:off x="411480" y="3429000"/>
-            <a:ext cx="2743200" cy="1554480"/>
-          </a:xfrm>
-          <a:prstGeom prst="roundRect">
-            <a:avLst/>
-          </a:prstGeom>
-          <a:solidFill>
-            <a:srgbClr val="2A357A"/>
-          </a:solidFill>
-          <a:ln>
-            <a:noFill/>
-          </a:ln>
-        </p:spPr>
-        <p:style>
-          <a:lnRef idx="1">
-            <a:schemeClr val="accent1"/>
-          </a:lnRef>
-          <a:fillRef idx="3">
-            <a:schemeClr val="accent1"/>
-          </a:fillRef>
-          <a:effectRef idx="2">
-            <a:schemeClr val="accent1"/>
-          </a:effectRef>
-          <a:fontRef idx="minor">
-            <a:schemeClr val="lt1"/>
-          </a:fontRef>
-        </p:style>
-        <p:txBody>
-          <a:bodyPr rtlCol="0" anchor="ctr"/>
-          <a:lstStyle/>
-          <a:p>
-            <a:pPr algn="ctr"/>
-          </a:p>
-        </p:txBody>
-      </p:sp>
-      <p:sp>
-        <p:nvSpPr>
-          <p:cNvPr id="18" name="TextBox 17"/>
-          <p:cNvSpPr txBox="1"/>
-          <p:nvPr/>
-        </p:nvSpPr>
-        <p:spPr>
-          <a:xfrm>
-            <a:off x="502920" y="3566160"/>
-            <a:ext cx="2560320" cy="411480"/>
-          </a:xfrm>
-          <a:prstGeom prst="rect">
-            <a:avLst/>
-          </a:prstGeom>
-          <a:noFill/>
-        </p:spPr>
-        <p:txBody>
-          <a:bodyPr wrap="square">
-            <a:spAutoFit/>
-          </a:bodyPr>
-          <a:lstStyle/>
-          <a:p>
-            <a:pPr algn="l"/>
-            <a:r>
-              <a:rPr sz="1500" b="1">
-                <a:solidFill>
-                  <a:srgbClr val="E8A838"/>
-                </a:solidFill>
-                <a:latin typeface="Calibri"/>
-              </a:rPr>
-              <a:t>B1  Dijkstra</a:t>
-            </a:r>
-          </a:p>
-        </p:txBody>
-      </p:sp>
-      <p:sp>
-        <p:nvSpPr>
-          <p:cNvPr id="19" name="TextBox 18"/>
-          <p:cNvSpPr txBox="1"/>
-          <p:nvPr/>
-        </p:nvSpPr>
-        <p:spPr>
-          <a:xfrm>
-            <a:off x="502920" y="4023360"/>
-            <a:ext cx="2560320" cy="777240"/>
-          </a:xfrm>
-          <a:prstGeom prst="rect">
-            <a:avLst/>
-          </a:prstGeom>
-          <a:noFill/>
-        </p:spPr>
-        <p:txBody>
-          <a:bodyPr wrap="square">
-            <a:spAutoFit/>
-          </a:bodyPr>
-          <a:lstStyle/>
-          <a:p>
-            <a:pPr algn="l"/>
-            <a:r>
-              <a:rPr sz="1300" b="0">
-                <a:solidFill>
-                  <a:srgbClr val="FFFFFF"/>
-                </a:solidFill>
-                <a:latin typeface="Calibri"/>
-              </a:rPr>
-              <a:t>Current snapshot
-— dispatch practice</a:t>
-            </a:r>
-          </a:p>
-        </p:txBody>
-      </p:sp>
-      <p:sp>
-        <p:nvSpPr>
-          <p:cNvPr id="20" name="Rounded Rectangle 19"/>
-          <p:cNvSpPr/>
-          <p:nvPr/>
-        </p:nvSpPr>
-        <p:spPr>
-          <a:xfrm>
-            <a:off x="3337560" y="3429000"/>
-            <a:ext cx="2743200" cy="1554480"/>
-          </a:xfrm>
-          <a:prstGeom prst="roundRect">
-            <a:avLst/>
-          </a:prstGeom>
-          <a:solidFill>
-            <a:srgbClr val="2A357A"/>
-          </a:solidFill>
-          <a:ln>
-            <a:noFill/>
-          </a:ln>
-        </p:spPr>
-        <p:style>
-          <a:lnRef idx="1">
-            <a:schemeClr val="accent1"/>
-          </a:lnRef>
-          <a:fillRef idx="3">
-            <a:schemeClr val="accent1"/>
-          </a:fillRef>
-          <a:effectRef idx="2">
-            <a:schemeClr val="accent1"/>
-          </a:effectRef>
-          <a:fontRef idx="minor">
-            <a:schemeClr val="lt1"/>
-          </a:fontRef>
-        </p:style>
-        <p:txBody>
-          <a:bodyPr rtlCol="0" anchor="ctr"/>
-          <a:lstStyle/>
-          <a:p>
-            <a:pPr algn="ctr"/>
-          </a:p>
-        </p:txBody>
-      </p:sp>
-      <p:sp>
-        <p:nvSpPr>
-          <p:cNvPr id="21" name="TextBox 20"/>
-          <p:cNvSpPr txBox="1"/>
-          <p:nvPr/>
-        </p:nvSpPr>
-        <p:spPr>
-          <a:xfrm>
-            <a:off x="3429000" y="3566160"/>
-            <a:ext cx="2560320" cy="411480"/>
-          </a:xfrm>
-          <a:prstGeom prst="rect">
-            <a:avLst/>
-          </a:prstGeom>
-          <a:noFill/>
-        </p:spPr>
-        <p:txBody>
-          <a:bodyPr wrap="square">
-            <a:spAutoFit/>
-          </a:bodyPr>
-          <a:lstStyle/>
-          <a:p>
-            <a:pPr algn="l"/>
-            <a:r>
-              <a:rPr sz="1500" b="1">
-                <a:solidFill>
-                  <a:srgbClr val="E8A838"/>
-                </a:solidFill>
-                <a:latin typeface="Calibri"/>
-              </a:rPr>
-              <a:t>B2  Static A*</a:t>
-            </a:r>
-          </a:p>
-        </p:txBody>
-      </p:sp>
-      <p:sp>
-        <p:nvSpPr>
-          <p:cNvPr id="22" name="TextBox 21"/>
-          <p:cNvSpPr txBox="1"/>
-          <p:nvPr/>
-        </p:nvSpPr>
-        <p:spPr>
-          <a:xfrm>
-            <a:off x="3429000" y="4023360"/>
-            <a:ext cx="2560320" cy="777240"/>
-          </a:xfrm>
-          <a:prstGeom prst="rect">
-            <a:avLst/>
-          </a:prstGeom>
-          <a:noFill/>
-        </p:spPr>
-        <p:txBody>
-          <a:bodyPr wrap="square">
-            <a:spAutoFit/>
-          </a:bodyPr>
-          <a:lstStyle/>
-          <a:p>
-            <a:pPr algn="l"/>
-            <a:r>
-              <a:rPr sz="1300" b="0">
-                <a:solidFill>
-                  <a:srgbClr val="FFFFFF"/>
-                </a:solidFill>
-                <a:latin typeface="Calibri"/>
-              </a:rPr>
-              <a:t>Historical mean
-— average day</a:t>
-            </a:r>
-          </a:p>
-        </p:txBody>
-      </p:sp>
-      <p:sp>
-        <p:nvSpPr>
-          <p:cNvPr id="23" name="Rounded Rectangle 22"/>
-          <p:cNvSpPr/>
-          <p:nvPr/>
-        </p:nvSpPr>
-        <p:spPr>
-          <a:xfrm>
-            <a:off x="6263640" y="3429000"/>
-            <a:ext cx="2743200" cy="1554480"/>
-          </a:xfrm>
-          <a:prstGeom prst="roundRect">
-            <a:avLst/>
-          </a:prstGeom>
-          <a:solidFill>
-            <a:srgbClr val="2A357A"/>
-          </a:solidFill>
-          <a:ln>
-            <a:noFill/>
-          </a:ln>
-        </p:spPr>
-        <p:style>
-          <a:lnRef idx="1">
-            <a:schemeClr val="accent1"/>
-          </a:lnRef>
-          <a:fillRef idx="3">
-            <a:schemeClr val="accent1"/>
-          </a:fillRef>
-          <a:effectRef idx="2">
-            <a:schemeClr val="accent1"/>
-          </a:effectRef>
-          <a:fontRef idx="minor">
-            <a:schemeClr val="lt1"/>
-          </a:fontRef>
-        </p:style>
-        <p:txBody>
-          <a:bodyPr rtlCol="0" anchor="ctr"/>
-          <a:lstStyle/>
-          <a:p>
-            <a:pPr algn="ctr"/>
-          </a:p>
-        </p:txBody>
-      </p:sp>
-      <p:sp>
-        <p:nvSpPr>
-          <p:cNvPr id="24" name="TextBox 23"/>
-          <p:cNvSpPr txBox="1"/>
-          <p:nvPr/>
-        </p:nvSpPr>
-        <p:spPr>
-          <a:xfrm>
-            <a:off x="6355080" y="3566160"/>
-            <a:ext cx="2560320" cy="411480"/>
-          </a:xfrm>
-          <a:prstGeom prst="rect">
-            <a:avLst/>
-          </a:prstGeom>
-          <a:noFill/>
-        </p:spPr>
-        <p:txBody>
-          <a:bodyPr wrap="square">
-            <a:spAutoFit/>
-          </a:bodyPr>
-          <a:lstStyle/>
-          <a:p>
-            <a:pPr algn="l"/>
-            <a:r>
-              <a:rPr sz="1500" b="1">
-                <a:solidFill>
-                  <a:srgbClr val="E8A838"/>
-                </a:solidFill>
-                <a:latin typeface="Calibri"/>
-              </a:rPr>
-              <a:t>B3  Reactive A*</a:t>
-            </a:r>
-          </a:p>
-        </p:txBody>
-      </p:sp>
-      <p:sp>
-        <p:nvSpPr>
-          <p:cNvPr id="25" name="TextBox 24"/>
-          <p:cNvSpPr txBox="1"/>
-          <p:nvPr/>
-        </p:nvSpPr>
-        <p:spPr>
-          <a:xfrm>
-            <a:off x="6355080" y="4023360"/>
-            <a:ext cx="2560320" cy="777240"/>
-          </a:xfrm>
-          <a:prstGeom prst="rect">
-            <a:avLst/>
-          </a:prstGeom>
-          <a:noFill/>
-        </p:spPr>
-        <p:txBody>
-          <a:bodyPr wrap="square">
-            <a:spAutoFit/>
-          </a:bodyPr>
-          <a:lstStyle/>
-          <a:p>
-            <a:pPr algn="l"/>
-            <a:r>
-              <a:rPr sz="1300" b="0">
-                <a:solidFill>
-                  <a:srgbClr val="FFFFFF"/>
-                </a:solidFill>
-                <a:latin typeface="Calibri"/>
-              </a:rPr>
-              <a:t>Replan after jam
-is already visible</a:t>
-            </a:r>
-          </a:p>
-        </p:txBody>
-      </p:sp>
-      <p:sp>
-        <p:nvSpPr>
-          <p:cNvPr id="26" name="Rounded Rectangle 25"/>
-          <p:cNvSpPr/>
-          <p:nvPr/>
-        </p:nvSpPr>
-        <p:spPr>
-          <a:xfrm>
-            <a:off x="9189720" y="3429000"/>
-            <a:ext cx="2743200" cy="1554480"/>
-          </a:xfrm>
-          <a:prstGeom prst="roundRect">
-            <a:avLst/>
-          </a:prstGeom>
-          <a:solidFill>
-            <a:srgbClr val="2A357A"/>
-          </a:solidFill>
-          <a:ln>
-            <a:noFill/>
-          </a:ln>
-        </p:spPr>
-        <p:style>
-          <a:lnRef idx="1">
-            <a:schemeClr val="accent1"/>
-          </a:lnRef>
-          <a:fillRef idx="3">
-            <a:schemeClr val="accent1"/>
-          </a:fillRef>
-          <a:effectRef idx="2">
-            <a:schemeClr val="accent1"/>
-          </a:effectRef>
-          <a:fontRef idx="minor">
-            <a:schemeClr val="lt1"/>
-          </a:fontRef>
-        </p:style>
-        <p:txBody>
-          <a:bodyPr rtlCol="0" anchor="ctr"/>
-          <a:lstStyle/>
-          <a:p>
-            <a:pPr algn="ctr"/>
-          </a:p>
-        </p:txBody>
-      </p:sp>
-      <p:sp>
-        <p:nvSpPr>
-          <p:cNvPr id="27" name="TextBox 26"/>
-          <p:cNvSpPr txBox="1"/>
-          <p:nvPr/>
-        </p:nvSpPr>
-        <p:spPr>
-          <a:xfrm>
-            <a:off x="9281160" y="3566160"/>
-            <a:ext cx="2560320" cy="411480"/>
-          </a:xfrm>
-          <a:prstGeom prst="rect">
-            <a:avLst/>
-          </a:prstGeom>
-          <a:noFill/>
-        </p:spPr>
-        <p:txBody>
-          <a:bodyPr wrap="square">
-            <a:spAutoFit/>
-          </a:bodyPr>
-          <a:lstStyle/>
-          <a:p>
-            <a:pPr algn="l"/>
-            <a:r>
-              <a:rPr sz="1500" b="1">
-                <a:solidFill>
-                  <a:srgbClr val="E8A838"/>
-                </a:solidFill>
-                <a:latin typeface="Calibri"/>
-              </a:rPr>
-              <a:t>B4  Oracle</a:t>
-            </a:r>
-          </a:p>
-        </p:txBody>
-      </p:sp>
-      <p:sp>
-        <p:nvSpPr>
-          <p:cNvPr id="28" name="TextBox 27"/>
-          <p:cNvSpPr txBox="1"/>
-          <p:nvPr/>
-        </p:nvSpPr>
-        <p:spPr>
-          <a:xfrm>
-            <a:off x="9281160" y="4023360"/>
-            <a:ext cx="2560320" cy="777240"/>
-          </a:xfrm>
-          <a:prstGeom prst="rect">
-            <a:avLst/>
-          </a:prstGeom>
-          <a:noFill/>
-        </p:spPr>
-        <p:txBody>
-          <a:bodyPr wrap="square">
-            <a:spAutoFit/>
-          </a:bodyPr>
-          <a:lstStyle/>
-          <a:p>
-            <a:pPr algn="l"/>
-            <a:r>
-              <a:rPr sz="1300" b="0">
-                <a:solidFill>
-                  <a:srgbClr val="FFFFFF"/>
-                </a:solidFill>
-                <a:latin typeface="Calibri"/>
-              </a:rPr>
-              <a:t>Perfect future speeds
-— unreachable ceiling</a:t>
-            </a:r>
-          </a:p>
-        </p:txBody>
-      </p:sp>
-      <p:sp>
-        <p:nvSpPr>
-          <p:cNvPr id="29" name="Rectangle 28"/>
+              <a:t>Objectives 1–2 are summarised (architecture, MAE, two datasets). Objectives 3–4 are reported in full: δ sweep, 900 matched journeys, four baselines, and computational feasibility.</a:t>
+            </a:r>
+          </a:p>
+        </p:txBody>
+      </p:sp>
+      <p:sp>
+        <p:nvSpPr>
+          <p:cNvPr id="19" name="Rectangle 18"/>
           <p:cNvSpPr/>
           <p:nvPr/>
         </p:nvSpPr>
@@ -8177,7 +7558,7 @@
       </p:sp>
       <p:sp>
         <p:nvSpPr>
-          <p:cNvPr id="30" name="TextBox 29"/>
+          <p:cNvPr id="20" name="TextBox 19"/>
           <p:cNvSpPr txBox="1"/>
           <p:nvPr/>
         </p:nvSpPr>
@@ -8211,7 +7592,7 @@
       </p:sp>
       <p:sp>
         <p:nvSpPr>
-          <p:cNvPr id="31" name="TextBox 30"/>
+          <p:cNvPr id="21" name="TextBox 20"/>
           <p:cNvSpPr txBox="1"/>
           <p:nvPr/>
         </p:nvSpPr>
@@ -8343,7 +7724,7 @@
                 </a:solidFill>
                 <a:latin typeface="Cambria"/>
               </a:rPr>
-              <a:t>Objective 3 — which remaining-time trigger?</a:t>
+              <a:t>Proposed framework</a:t>
             </a:r>
           </a:p>
         </p:txBody>
@@ -8356,8 +7737,8 @@
         </p:nvSpPr>
         <p:spPr>
           <a:xfrm>
-            <a:off x="457200" y="868680"/>
-            <a:ext cx="11247120" cy="1371600"/>
+            <a:off x="411480" y="868680"/>
+            <a:ext cx="3657600" cy="2148840"/>
           </a:xfrm>
           <a:prstGeom prst="roundRect">
             <a:avLst/>
@@ -8399,8 +7780,8 @@
         </p:nvSpPr>
         <p:spPr>
           <a:xfrm>
-            <a:off x="685800" y="1005840"/>
-            <a:ext cx="10789920" cy="1051560"/>
+            <a:off x="594360" y="1051560"/>
+            <a:ext cx="3291840" cy="411480"/>
           </a:xfrm>
           <a:prstGeom prst="rect">
             <a:avLst/>
@@ -8415,28 +7796,97 @@
           <a:p>
             <a:pPr algn="l"/>
             <a:r>
-              <a:rPr sz="1600" b="0">
+              <a:rPr sz="2800" b="1">
+                <a:solidFill>
+                  <a:srgbClr val="E8A838"/>
+                </a:solidFill>
+                <a:latin typeface="Cambria"/>
+              </a:rPr>
+              <a:t>1</a:t>
+            </a:r>
+          </a:p>
+        </p:txBody>
+      </p:sp>
+      <p:sp>
+        <p:nvSpPr>
+          <p:cNvPr id="6" name="TextBox 5"/>
+          <p:cNvSpPr txBox="1"/>
+          <p:nvPr/>
+        </p:nvSpPr>
+        <p:spPr>
+          <a:xfrm>
+            <a:off x="594360" y="1554480"/>
+            <a:ext cx="3291840" cy="365760"/>
+          </a:xfrm>
+          <a:prstGeom prst="rect">
+            <a:avLst/>
+          </a:prstGeom>
+          <a:noFill/>
+        </p:spPr>
+        <p:txBody>
+          <a:bodyPr wrap="square">
+            <a:spAutoFit/>
+          </a:bodyPr>
+          <a:lstStyle/>
+          <a:p>
+            <a:pPr algn="l"/>
+            <a:r>
+              <a:rPr sz="1800" b="1">
+                <a:solidFill>
+                  <a:srgbClr val="CADCFC"/>
+                </a:solidFill>
+                <a:latin typeface="Calibri"/>
+              </a:rPr>
+              <a:t>Observe</a:t>
+            </a:r>
+          </a:p>
+        </p:txBody>
+      </p:sp>
+      <p:sp>
+        <p:nvSpPr>
+          <p:cNvPr id="7" name="TextBox 6"/>
+          <p:cNvSpPr txBox="1"/>
+          <p:nvPr/>
+        </p:nvSpPr>
+        <p:spPr>
+          <a:xfrm>
+            <a:off x="594360" y="2011680"/>
+            <a:ext cx="3291840" cy="777240"/>
+          </a:xfrm>
+          <a:prstGeom prst="rect">
+            <a:avLst/>
+          </a:prstGeom>
+          <a:noFill/>
+        </p:spPr>
+        <p:txBody>
+          <a:bodyPr wrap="square">
+            <a:spAutoFit/>
+          </a:bodyPr>
+          <a:lstStyle/>
+          <a:p>
+            <a:pPr algn="l"/>
+            <a:r>
+              <a:rPr sz="1400" b="0">
                 <a:solidFill>
                   <a:srgbClr val="FFFFFF"/>
                 </a:solidFill>
                 <a:latin typeface="Calibri"/>
               </a:rPr>
-              <a:t>RQ3: What δ balances route reliability against extra dispatcher alerts?
-A new path is offered if remaining time from the current position grows by more than δ, or a new path is better by δ.</a:t>
-            </a:r>
-          </a:p>
-        </p:txBody>
-      </p:sp>
-      <p:sp>
-        <p:nvSpPr>
-          <p:cNvPr id="6" name="Rounded Rectangle 5"/>
+              <a:t>12 steps of detector speeds (60 minutes).</a:t>
+            </a:r>
+          </a:p>
+        </p:txBody>
+      </p:sp>
+      <p:sp>
+        <p:nvSpPr>
+          <p:cNvPr id="8" name="Rounded Rectangle 7"/>
           <p:cNvSpPr/>
           <p:nvPr/>
         </p:nvSpPr>
         <p:spPr>
           <a:xfrm>
-            <a:off x="457200" y="2468880"/>
-            <a:ext cx="5486400" cy="3200400"/>
+            <a:off x="4251960" y="868680"/>
+            <a:ext cx="3657600" cy="2148840"/>
           </a:xfrm>
           <a:prstGeom prst="roundRect">
             <a:avLst/>
@@ -8472,14 +7922,14 @@
       </p:sp>
       <p:sp>
         <p:nvSpPr>
-          <p:cNvPr id="7" name="TextBox 6"/>
+          <p:cNvPr id="9" name="TextBox 8"/>
           <p:cNvSpPr txBox="1"/>
           <p:nvPr/>
         </p:nvSpPr>
         <p:spPr>
           <a:xfrm>
-            <a:off x="685800" y="2651760"/>
-            <a:ext cx="5029200" cy="365760"/>
+            <a:off x="4434840" y="1051560"/>
+            <a:ext cx="3291840" cy="411480"/>
           </a:xfrm>
           <a:prstGeom prst="rect">
             <a:avLst/>
@@ -8494,27 +7944,27 @@
           <a:p>
             <a:pPr algn="l"/>
             <a:r>
-              <a:rPr sz="1600" b="1">
+              <a:rPr sz="2800" b="1">
                 <a:solidFill>
                   <a:srgbClr val="E8A838"/>
                 </a:solidFill>
-                <a:latin typeface="Calibri"/>
-              </a:rPr>
-              <a:t>δ  —  policy  (not a p-value)</a:t>
-            </a:r>
-          </a:p>
-        </p:txBody>
-      </p:sp>
-      <p:sp>
-        <p:nvSpPr>
-          <p:cNvPr id="8" name="TextBox 7"/>
+                <a:latin typeface="Cambria"/>
+              </a:rPr>
+              <a:t>2</a:t>
+            </a:r>
+          </a:p>
+        </p:txBody>
+      </p:sp>
+      <p:sp>
+        <p:nvSpPr>
+          <p:cNvPr id="10" name="TextBox 9"/>
           <p:cNvSpPr txBox="1"/>
           <p:nvPr/>
         </p:nvSpPr>
         <p:spPr>
           <a:xfrm>
-            <a:off x="685800" y="3108960"/>
-            <a:ext cx="5029200" cy="2286000"/>
+            <a:off x="4434840" y="1554480"/>
+            <a:ext cx="3291840" cy="365760"/>
           </a:xfrm>
           <a:prstGeom prst="rect">
             <a:avLst/>
@@ -8529,29 +7979,62 @@
           <a:p>
             <a:pPr algn="l"/>
             <a:r>
-              <a:rPr sz="1600" b="0">
+              <a:rPr sz="1800" b="1">
+                <a:solidFill>
+                  <a:srgbClr val="CADCFC"/>
+                </a:solidFill>
+                <a:latin typeface="Calibri"/>
+              </a:rPr>
+              <a:t>Forecast</a:t>
+            </a:r>
+          </a:p>
+        </p:txBody>
+      </p:sp>
+      <p:sp>
+        <p:nvSpPr>
+          <p:cNvPr id="11" name="TextBox 10"/>
+          <p:cNvSpPr txBox="1"/>
+          <p:nvPr/>
+        </p:nvSpPr>
+        <p:spPr>
+          <a:xfrm>
+            <a:off x="4434840" y="2011680"/>
+            <a:ext cx="3291840" cy="777240"/>
+          </a:xfrm>
+          <a:prstGeom prst="rect">
+            <a:avLst/>
+          </a:prstGeom>
+          <a:noFill/>
+        </p:spPr>
+        <p:txBody>
+          <a:bodyPr wrap="square">
+            <a:spAutoFit/>
+          </a:bodyPr>
+          <a:lstStyle/>
+          <a:p>
+            <a:pPr algn="l"/>
+            <a:r>
+              <a:rPr sz="1400" b="0">
                 <a:solidFill>
                   <a:srgbClr val="FFFFFF"/>
                 </a:solidFill>
                 <a:latin typeface="Calibri"/>
               </a:rPr>
-              <a:t>δ = 0.05 means: speak if the rest of the trip looks 5% worse.
-Tested {0.05, 0.10, 0.15, 0.20}.
-This is a dispatcher setting.</a:t>
-            </a:r>
-          </a:p>
-        </p:txBody>
-      </p:sp>
-      <p:sp>
-        <p:nvSpPr>
-          <p:cNvPr id="9" name="Rounded Rectangle 8"/>
+              <a:t>Two-layer GRU, 64 units, dropout 0.2 → 6 steps (30 minutes).</a:t>
+            </a:r>
+          </a:p>
+        </p:txBody>
+      </p:sp>
+      <p:sp>
+        <p:nvSpPr>
+          <p:cNvPr id="12" name="Rounded Rectangle 11"/>
           <p:cNvSpPr/>
           <p:nvPr/>
         </p:nvSpPr>
         <p:spPr>
           <a:xfrm>
-            <a:off x="6217920" y="2468880"/>
-            <a:ext cx="5486400" cy="3200400"/>
+            <a:off x="8092440" y="868680"/>
+            <a:ext cx="3657600" cy="2148840"/>
           </a:xfrm>
           <a:prstGeom prst="roundRect">
             <a:avLst/>
@@ -8587,14 +8070,14 @@
       </p:sp>
       <p:sp>
         <p:nvSpPr>
-          <p:cNvPr id="10" name="TextBox 9"/>
+          <p:cNvPr id="13" name="TextBox 12"/>
           <p:cNvSpPr txBox="1"/>
           <p:nvPr/>
         </p:nvSpPr>
         <p:spPr>
           <a:xfrm>
-            <a:off x="6446520" y="2651760"/>
-            <a:ext cx="5029200" cy="365760"/>
+            <a:off x="8275319" y="1051560"/>
+            <a:ext cx="3291840" cy="411480"/>
           </a:xfrm>
           <a:prstGeom prst="rect">
             <a:avLst/>
@@ -8609,27 +8092,27 @@
           <a:p>
             <a:pPr algn="l"/>
             <a:r>
-              <a:rPr sz="1600" b="1">
+              <a:rPr sz="2800" b="1">
                 <a:solidFill>
                   <a:srgbClr val="E8A838"/>
                 </a:solidFill>
-                <a:latin typeface="Calibri"/>
-              </a:rPr>
-              <a:t>α / p  —  statistics</a:t>
-            </a:r>
-          </a:p>
-        </p:txBody>
-      </p:sp>
-      <p:sp>
-        <p:nvSpPr>
-          <p:cNvPr id="11" name="TextBox 10"/>
+                <a:latin typeface="Cambria"/>
+              </a:rPr>
+              <a:t>3</a:t>
+            </a:r>
+          </a:p>
+        </p:txBody>
+      </p:sp>
+      <p:sp>
+        <p:nvSpPr>
+          <p:cNvPr id="14" name="TextBox 13"/>
           <p:cNvSpPr txBox="1"/>
           <p:nvPr/>
         </p:nvSpPr>
         <p:spPr>
           <a:xfrm>
-            <a:off x="6446520" y="3108960"/>
-            <a:ext cx="5029200" cy="2286000"/>
+            <a:off x="8275319" y="1554480"/>
+            <a:ext cx="3291840" cy="365760"/>
           </a:xfrm>
           <a:prstGeom prst="rect">
             <a:avLst/>
@@ -8644,21 +8127,499 @@
           <a:p>
             <a:pPr algn="l"/>
             <a:r>
-              <a:rPr sz="1600" b="0">
+              <a:rPr sz="1800" b="1">
+                <a:solidFill>
+                  <a:srgbClr val="CADCFC"/>
+                </a:solidFill>
+                <a:latin typeface="Calibri"/>
+              </a:rPr>
+              <a:t>Cost</a:t>
+            </a:r>
+          </a:p>
+        </p:txBody>
+      </p:sp>
+      <p:sp>
+        <p:nvSpPr>
+          <p:cNvPr id="15" name="TextBox 14"/>
+          <p:cNvSpPr txBox="1"/>
+          <p:nvPr/>
+        </p:nvSpPr>
+        <p:spPr>
+          <a:xfrm>
+            <a:off x="8275319" y="2011680"/>
+            <a:ext cx="3291840" cy="777240"/>
+          </a:xfrm>
+          <a:prstGeom prst="rect">
+            <a:avLst/>
+          </a:prstGeom>
+          <a:noFill/>
+        </p:spPr>
+        <p:txBody>
+          <a:bodyPr wrap="square">
+            <a:spAutoFit/>
+          </a:bodyPr>
+          <a:lstStyle/>
+          <a:p>
+            <a:pPr algn="l"/>
+            <a:r>
+              <a:rPr sz="1400" b="0">
                 <a:solidFill>
                   <a:srgbClr val="FFFFFF"/>
                 </a:solidFill>
                 <a:latin typeface="Calibri"/>
               </a:rPr>
-              <a:t>α = .05 means: call a mean reduction real only if a zero effect would produce it fewer than five times in a hundred.
-APA writes p = .0002 (no leading zero) because p cannot exceed 1.</a:t>
-            </a:r>
-          </a:p>
-        </p:txBody>
-      </p:sp>
-      <p:sp>
-        <p:nvSpPr>
-          <p:cNvPr id="12" name="Rectangle 11"/>
+              <a:t>Predicted mph converted to edge travel times on the detector graph.</a:t>
+            </a:r>
+          </a:p>
+        </p:txBody>
+      </p:sp>
+      <p:sp>
+        <p:nvSpPr>
+          <p:cNvPr id="16" name="Rounded Rectangle 15"/>
+          <p:cNvSpPr/>
+          <p:nvPr/>
+        </p:nvSpPr>
+        <p:spPr>
+          <a:xfrm>
+            <a:off x="411480" y="3200400"/>
+            <a:ext cx="3657600" cy="2148840"/>
+          </a:xfrm>
+          <a:prstGeom prst="roundRect">
+            <a:avLst/>
+          </a:prstGeom>
+          <a:solidFill>
+            <a:srgbClr val="2A357A"/>
+          </a:solidFill>
+          <a:ln>
+            <a:noFill/>
+          </a:ln>
+        </p:spPr>
+        <p:style>
+          <a:lnRef idx="1">
+            <a:schemeClr val="accent1"/>
+          </a:lnRef>
+          <a:fillRef idx="3">
+            <a:schemeClr val="accent1"/>
+          </a:fillRef>
+          <a:effectRef idx="2">
+            <a:schemeClr val="accent1"/>
+          </a:effectRef>
+          <a:fontRef idx="minor">
+            <a:schemeClr val="lt1"/>
+          </a:fontRef>
+        </p:style>
+        <p:txBody>
+          <a:bodyPr rtlCol="0" anchor="ctr"/>
+          <a:lstStyle/>
+          <a:p>
+            <a:pPr algn="ctr"/>
+          </a:p>
+        </p:txBody>
+      </p:sp>
+      <p:sp>
+        <p:nvSpPr>
+          <p:cNvPr id="17" name="TextBox 16"/>
+          <p:cNvSpPr txBox="1"/>
+          <p:nvPr/>
+        </p:nvSpPr>
+        <p:spPr>
+          <a:xfrm>
+            <a:off x="594360" y="3383280"/>
+            <a:ext cx="3291840" cy="411480"/>
+          </a:xfrm>
+          <a:prstGeom prst="rect">
+            <a:avLst/>
+          </a:prstGeom>
+          <a:noFill/>
+        </p:spPr>
+        <p:txBody>
+          <a:bodyPr wrap="square">
+            <a:spAutoFit/>
+          </a:bodyPr>
+          <a:lstStyle/>
+          <a:p>
+            <a:pPr algn="l"/>
+            <a:r>
+              <a:rPr sz="2800" b="1">
+                <a:solidFill>
+                  <a:srgbClr val="E8A838"/>
+                </a:solidFill>
+                <a:latin typeface="Cambria"/>
+              </a:rPr>
+              <a:t>4</a:t>
+            </a:r>
+          </a:p>
+        </p:txBody>
+      </p:sp>
+      <p:sp>
+        <p:nvSpPr>
+          <p:cNvPr id="18" name="TextBox 17"/>
+          <p:cNvSpPr txBox="1"/>
+          <p:nvPr/>
+        </p:nvSpPr>
+        <p:spPr>
+          <a:xfrm>
+            <a:off x="594360" y="3886200"/>
+            <a:ext cx="3291840" cy="365760"/>
+          </a:xfrm>
+          <a:prstGeom prst="rect">
+            <a:avLst/>
+          </a:prstGeom>
+          <a:noFill/>
+        </p:spPr>
+        <p:txBody>
+          <a:bodyPr wrap="square">
+            <a:spAutoFit/>
+          </a:bodyPr>
+          <a:lstStyle/>
+          <a:p>
+            <a:pPr algn="l"/>
+            <a:r>
+              <a:rPr sz="1800" b="1">
+                <a:solidFill>
+                  <a:srgbClr val="CADCFC"/>
+                </a:solidFill>
+                <a:latin typeface="Calibri"/>
+              </a:rPr>
+              <a:t>Route</a:t>
+            </a:r>
+          </a:p>
+        </p:txBody>
+      </p:sp>
+      <p:sp>
+        <p:nvSpPr>
+          <p:cNvPr id="19" name="TextBox 18"/>
+          <p:cNvSpPr txBox="1"/>
+          <p:nvPr/>
+        </p:nvSpPr>
+        <p:spPr>
+          <a:xfrm>
+            <a:off x="594360" y="4343400"/>
+            <a:ext cx="3291840" cy="777240"/>
+          </a:xfrm>
+          <a:prstGeom prst="rect">
+            <a:avLst/>
+          </a:prstGeom>
+          <a:noFill/>
+        </p:spPr>
+        <p:txBody>
+          <a:bodyPr wrap="square">
+            <a:spAutoFit/>
+          </a:bodyPr>
+          <a:lstStyle/>
+          <a:p>
+            <a:pPr algn="l"/>
+            <a:r>
+              <a:rPr sz="1400" b="0">
+                <a:solidFill>
+                  <a:srgbClr val="FFFFFF"/>
+                </a:solidFill>
+                <a:latin typeface="Calibri"/>
+              </a:rPr>
+              <a:t>Time-dependent A* from origin to destination.</a:t>
+            </a:r>
+          </a:p>
+        </p:txBody>
+      </p:sp>
+      <p:sp>
+        <p:nvSpPr>
+          <p:cNvPr id="20" name="Rounded Rectangle 19"/>
+          <p:cNvSpPr/>
+          <p:nvPr/>
+        </p:nvSpPr>
+        <p:spPr>
+          <a:xfrm>
+            <a:off x="4251960" y="3200400"/>
+            <a:ext cx="3657600" cy="2148840"/>
+          </a:xfrm>
+          <a:prstGeom prst="roundRect">
+            <a:avLst/>
+          </a:prstGeom>
+          <a:solidFill>
+            <a:srgbClr val="2A357A"/>
+          </a:solidFill>
+          <a:ln>
+            <a:noFill/>
+          </a:ln>
+        </p:spPr>
+        <p:style>
+          <a:lnRef idx="1">
+            <a:schemeClr val="accent1"/>
+          </a:lnRef>
+          <a:fillRef idx="3">
+            <a:schemeClr val="accent1"/>
+          </a:fillRef>
+          <a:effectRef idx="2">
+            <a:schemeClr val="accent1"/>
+          </a:effectRef>
+          <a:fontRef idx="minor">
+            <a:schemeClr val="lt1"/>
+          </a:fontRef>
+        </p:style>
+        <p:txBody>
+          <a:bodyPr rtlCol="0" anchor="ctr"/>
+          <a:lstStyle/>
+          <a:p>
+            <a:pPr algn="ctr"/>
+          </a:p>
+        </p:txBody>
+      </p:sp>
+      <p:sp>
+        <p:nvSpPr>
+          <p:cNvPr id="21" name="TextBox 20"/>
+          <p:cNvSpPr txBox="1"/>
+          <p:nvPr/>
+        </p:nvSpPr>
+        <p:spPr>
+          <a:xfrm>
+            <a:off x="4434840" y="3383280"/>
+            <a:ext cx="3291840" cy="411480"/>
+          </a:xfrm>
+          <a:prstGeom prst="rect">
+            <a:avLst/>
+          </a:prstGeom>
+          <a:noFill/>
+        </p:spPr>
+        <p:txBody>
+          <a:bodyPr wrap="square">
+            <a:spAutoFit/>
+          </a:bodyPr>
+          <a:lstStyle/>
+          <a:p>
+            <a:pPr algn="l"/>
+            <a:r>
+              <a:rPr sz="2800" b="1">
+                <a:solidFill>
+                  <a:srgbClr val="E8A838"/>
+                </a:solidFill>
+                <a:latin typeface="Cambria"/>
+              </a:rPr>
+              <a:t>5</a:t>
+            </a:r>
+          </a:p>
+        </p:txBody>
+      </p:sp>
+      <p:sp>
+        <p:nvSpPr>
+          <p:cNvPr id="22" name="TextBox 21"/>
+          <p:cNvSpPr txBox="1"/>
+          <p:nvPr/>
+        </p:nvSpPr>
+        <p:spPr>
+          <a:xfrm>
+            <a:off x="4434840" y="3886200"/>
+            <a:ext cx="3291840" cy="365760"/>
+          </a:xfrm>
+          <a:prstGeom prst="rect">
+            <a:avLst/>
+          </a:prstGeom>
+          <a:noFill/>
+        </p:spPr>
+        <p:txBody>
+          <a:bodyPr wrap="square">
+            <a:spAutoFit/>
+          </a:bodyPr>
+          <a:lstStyle/>
+          <a:p>
+            <a:pPr algn="l"/>
+            <a:r>
+              <a:rPr sz="1800" b="1">
+                <a:solidFill>
+                  <a:srgbClr val="CADCFC"/>
+                </a:solidFill>
+                <a:latin typeface="Calibri"/>
+              </a:rPr>
+              <a:t>Control</a:t>
+            </a:r>
+          </a:p>
+        </p:txBody>
+      </p:sp>
+      <p:sp>
+        <p:nvSpPr>
+          <p:cNvPr id="23" name="TextBox 22"/>
+          <p:cNvSpPr txBox="1"/>
+          <p:nvPr/>
+        </p:nvSpPr>
+        <p:spPr>
+          <a:xfrm>
+            <a:off x="4434840" y="4343400"/>
+            <a:ext cx="3291840" cy="777240"/>
+          </a:xfrm>
+          <a:prstGeom prst="rect">
+            <a:avLst/>
+          </a:prstGeom>
+          <a:noFill/>
+        </p:spPr>
+        <p:txBody>
+          <a:bodyPr wrap="square">
+            <a:spAutoFit/>
+          </a:bodyPr>
+          <a:lstStyle/>
+          <a:p>
+            <a:pPr algn="l"/>
+            <a:r>
+              <a:rPr sz="1400" b="0">
+                <a:solidFill>
+                  <a:srgbClr val="FFFFFF"/>
+                </a:solidFill>
+                <a:latin typeface="Calibri"/>
+              </a:rPr>
+              <a:t>Offer a new path if remaining time grows by more than δ.</a:t>
+            </a:r>
+          </a:p>
+        </p:txBody>
+      </p:sp>
+      <p:sp>
+        <p:nvSpPr>
+          <p:cNvPr id="24" name="Rounded Rectangle 23"/>
+          <p:cNvSpPr/>
+          <p:nvPr/>
+        </p:nvSpPr>
+        <p:spPr>
+          <a:xfrm>
+            <a:off x="8092440" y="3200400"/>
+            <a:ext cx="3657600" cy="2148840"/>
+          </a:xfrm>
+          <a:prstGeom prst="roundRect">
+            <a:avLst/>
+          </a:prstGeom>
+          <a:solidFill>
+            <a:srgbClr val="2A357A"/>
+          </a:solidFill>
+          <a:ln>
+            <a:noFill/>
+          </a:ln>
+        </p:spPr>
+        <p:style>
+          <a:lnRef idx="1">
+            <a:schemeClr val="accent1"/>
+          </a:lnRef>
+          <a:fillRef idx="3">
+            <a:schemeClr val="accent1"/>
+          </a:fillRef>
+          <a:effectRef idx="2">
+            <a:schemeClr val="accent1"/>
+          </a:effectRef>
+          <a:fontRef idx="minor">
+            <a:schemeClr val="lt1"/>
+          </a:fontRef>
+        </p:style>
+        <p:txBody>
+          <a:bodyPr rtlCol="0" anchor="ctr"/>
+          <a:lstStyle/>
+          <a:p>
+            <a:pPr algn="ctr"/>
+          </a:p>
+        </p:txBody>
+      </p:sp>
+      <p:sp>
+        <p:nvSpPr>
+          <p:cNvPr id="25" name="TextBox 24"/>
+          <p:cNvSpPr txBox="1"/>
+          <p:nvPr/>
+        </p:nvSpPr>
+        <p:spPr>
+          <a:xfrm>
+            <a:off x="8275319" y="3383280"/>
+            <a:ext cx="3291840" cy="411480"/>
+          </a:xfrm>
+          <a:prstGeom prst="rect">
+            <a:avLst/>
+          </a:prstGeom>
+          <a:noFill/>
+        </p:spPr>
+        <p:txBody>
+          <a:bodyPr wrap="square">
+            <a:spAutoFit/>
+          </a:bodyPr>
+          <a:lstStyle/>
+          <a:p>
+            <a:pPr algn="l"/>
+            <a:r>
+              <a:rPr sz="2800" b="1">
+                <a:solidFill>
+                  <a:srgbClr val="E8A838"/>
+                </a:solidFill>
+                <a:latin typeface="Cambria"/>
+              </a:rPr>
+              <a:t>6</a:t>
+            </a:r>
+          </a:p>
+        </p:txBody>
+      </p:sp>
+      <p:sp>
+        <p:nvSpPr>
+          <p:cNvPr id="26" name="TextBox 25"/>
+          <p:cNvSpPr txBox="1"/>
+          <p:nvPr/>
+        </p:nvSpPr>
+        <p:spPr>
+          <a:xfrm>
+            <a:off x="8275319" y="3886200"/>
+            <a:ext cx="3291840" cy="365760"/>
+          </a:xfrm>
+          <a:prstGeom prst="rect">
+            <a:avLst/>
+          </a:prstGeom>
+          <a:noFill/>
+        </p:spPr>
+        <p:txBody>
+          <a:bodyPr wrap="square">
+            <a:spAutoFit/>
+          </a:bodyPr>
+          <a:lstStyle/>
+          <a:p>
+            <a:pPr algn="l"/>
+            <a:r>
+              <a:rPr sz="1800" b="1">
+                <a:solidFill>
+                  <a:srgbClr val="CADCFC"/>
+                </a:solidFill>
+                <a:latin typeface="Calibri"/>
+              </a:rPr>
+              <a:t>Authority</a:t>
+            </a:r>
+          </a:p>
+        </p:txBody>
+      </p:sp>
+      <p:sp>
+        <p:nvSpPr>
+          <p:cNvPr id="27" name="TextBox 26"/>
+          <p:cNvSpPr txBox="1"/>
+          <p:nvPr/>
+        </p:nvSpPr>
+        <p:spPr>
+          <a:xfrm>
+            <a:off x="8275319" y="4343400"/>
+            <a:ext cx="3291840" cy="777240"/>
+          </a:xfrm>
+          <a:prstGeom prst="rect">
+            <a:avLst/>
+          </a:prstGeom>
+          <a:noFill/>
+        </p:spPr>
+        <p:txBody>
+          <a:bodyPr wrap="square">
+            <a:spAutoFit/>
+          </a:bodyPr>
+          <a:lstStyle/>
+          <a:p>
+            <a:pPr algn="l"/>
+            <a:r>
+              <a:rPr sz="1400" b="0">
+                <a:solidFill>
+                  <a:srgbClr val="FFFFFF"/>
+                </a:solidFill>
+                <a:latin typeface="Calibri"/>
+              </a:rPr>
+              <a:t>Dispatcher accepts or rejects. The vehicle is not autonomous.</a:t>
+            </a:r>
+          </a:p>
+        </p:txBody>
+      </p:sp>
+      <p:sp>
+        <p:nvSpPr>
+          <p:cNvPr id="28" name="Rectangle 27"/>
           <p:cNvSpPr/>
           <p:nvPr/>
         </p:nvSpPr>
@@ -8701,7 +8662,7 @@
       </p:sp>
       <p:sp>
         <p:nvSpPr>
-          <p:cNvPr id="13" name="TextBox 12"/>
+          <p:cNvPr id="29" name="TextBox 28"/>
           <p:cNvSpPr txBox="1"/>
           <p:nvPr/>
         </p:nvSpPr>
@@ -8735,7 +8696,7 @@
       </p:sp>
       <p:sp>
         <p:nvSpPr>
-          <p:cNvPr id="14" name="TextBox 13"/>
+          <p:cNvPr id="30" name="TextBox 29"/>
           <p:cNvSpPr txBox="1"/>
           <p:nvPr/>
         </p:nvSpPr>
@@ -8845,7 +8806,7 @@
         </p:nvSpPr>
         <p:spPr>
           <a:xfrm>
-            <a:off x="457200" y="201168"/>
+            <a:off x="457200" y="256032"/>
             <a:ext cx="10972800" cy="365760"/>
           </a:xfrm>
           <a:prstGeom prst="rect">
@@ -8861,51 +8822,27 @@
           <a:p>
             <a:pPr algn="l"/>
             <a:r>
-              <a:rPr sz="2400" b="1">
+              <a:rPr sz="2600" b="1">
                 <a:solidFill>
                   <a:srgbClr val="FFFFFF"/>
                 </a:solidFill>
                 <a:latin typeface="Cambria"/>
               </a:rPr>
-              <a:t>Objective 3 — travel time did not move with δ</a:t>
-            </a:r>
-          </a:p>
-        </p:txBody>
-      </p:sp>
-      <p:pic>
-        <p:nvPicPr>
-          <p:cNvPr id="4" name="Picture 3" descr="fig3_delta_sensitivity.png"/>
-          <p:cNvPicPr>
-            <a:picLocks noChangeAspect="1"/>
-          </p:cNvPicPr>
-          <p:nvPr/>
-        </p:nvPicPr>
-        <p:blipFill>
-          <a:blip r:embed="rId2"/>
-          <a:stretch>
-            <a:fillRect/>
-          </a:stretch>
-        </p:blipFill>
-        <p:spPr>
-          <a:xfrm>
-            <a:off x="320040" y="640080"/>
-            <a:ext cx="7589520" cy="3165865"/>
-          </a:xfrm>
-          <a:prstGeom prst="rect">
-            <a:avLst/>
-          </a:prstGeom>
-        </p:spPr>
-      </p:pic>
-      <p:sp>
-        <p:nvSpPr>
-          <p:cNvPr id="5" name="Rounded Rectangle 4"/>
+              <a:t>Data, graph, and experimental design</a:t>
+            </a:r>
+          </a:p>
+        </p:txBody>
+      </p:sp>
+      <p:sp>
+        <p:nvSpPr>
+          <p:cNvPr id="4" name="Rounded Rectangle 3"/>
           <p:cNvSpPr/>
           <p:nvPr/>
         </p:nvSpPr>
         <p:spPr>
           <a:xfrm>
-            <a:off x="8046720" y="822960"/>
-            <a:ext cx="3749039" cy="4937760"/>
+            <a:off x="411480" y="777240"/>
+            <a:ext cx="5577840" cy="5029200"/>
           </a:xfrm>
           <a:prstGeom prst="roundRect">
             <a:avLst/>
@@ -8941,14 +8878,14 @@
       </p:sp>
       <p:sp>
         <p:nvSpPr>
-          <p:cNvPr id="6" name="TextBox 5"/>
+          <p:cNvPr id="5" name="TextBox 4"/>
           <p:cNvSpPr txBox="1"/>
           <p:nvPr/>
         </p:nvSpPr>
         <p:spPr>
           <a:xfrm>
-            <a:off x="8229600" y="1005840"/>
-            <a:ext cx="3383280" cy="365760"/>
+            <a:off x="640080" y="960120"/>
+            <a:ext cx="5120640" cy="320040"/>
           </a:xfrm>
           <a:prstGeom prst="rect">
             <a:avLst/>
@@ -8969,21 +8906,21 @@
                 </a:solidFill>
                 <a:latin typeface="Calibri"/>
               </a:rPr>
-              <a:t>Read the figure</a:t>
-            </a:r>
-          </a:p>
-        </p:txBody>
-      </p:sp>
-      <p:sp>
-        <p:nvSpPr>
-          <p:cNvPr id="7" name="TextBox 6"/>
+              <a:t>Data and network</a:t>
+            </a:r>
+          </a:p>
+        </p:txBody>
+      </p:sp>
+      <p:sp>
+        <p:nvSpPr>
+          <p:cNvPr id="6" name="TextBox 5"/>
           <p:cNvSpPr txBox="1"/>
           <p:nvPr/>
         </p:nvSpPr>
         <p:spPr>
           <a:xfrm>
-            <a:off x="8229600" y="1417320"/>
-            <a:ext cx="3383280" cy="4114800"/>
+            <a:off x="640080" y="1417320"/>
+            <a:ext cx="5120640" cy="4114800"/>
           </a:xfrm>
           <a:prstGeom prst="rect">
             <a:avLst/>
@@ -8996,28 +8933,239 @@
           </a:bodyPr>
           <a:lstStyle/>
           <a:p>
+            <a:pPr algn="l">
+              <a:spcAft>
+                <a:spcPts val="1400"/>
+              </a:spcAft>
+            </a:pPr>
+            <a:r>
+              <a:rPr sz="1500">
+                <a:solidFill>
+                  <a:srgbClr val="FFFFFF"/>
+                </a:solidFill>
+                <a:latin typeface="Calibri"/>
+              </a:rPr>
+              <a:t>•  METR-LA: 207 loop detectors, 34,272 five-minute frames (Li et al., 2018).</a:t>
+            </a:r>
+          </a:p>
+          <a:p>
+            <a:pPr algn="l">
+              <a:spcAft>
+                <a:spcPts val="1400"/>
+              </a:spcAft>
+            </a:pPr>
+            <a:r>
+              <a:rPr sz="1500">
+                <a:solidFill>
+                  <a:srgbClr val="FFFFFF"/>
+                </a:solidFill>
+                <a:latin typeface="Calibri"/>
+              </a:rPr>
+              <a:t>•  PEMS-BAY: 325 detectors, January–May 2017 (five months). Separate GRU; prediction only.</a:t>
+            </a:r>
+          </a:p>
+          <a:p>
+            <a:pPr algn="l">
+              <a:spcAft>
+                <a:spcPts val="1400"/>
+              </a:spcAft>
+            </a:pPr>
+            <a:r>
+              <a:rPr sz="1500">
+                <a:solidFill>
+                  <a:srgbClr val="FFFFFF"/>
+                </a:solidFill>
+                <a:latin typeface="Calibri"/>
+              </a:rPr>
+              <a:t>•  StandardScaler fitted on the training split only (no leakage from val/test).</a:t>
+            </a:r>
+          </a:p>
+          <a:p>
+            <a:pPr algn="l">
+              <a:spcAft>
+                <a:spcPts val="1400"/>
+              </a:spcAft>
+            </a:pPr>
+            <a:r>
+              <a:rPr sz="1500">
+                <a:solidFill>
+                  <a:srgbClr val="FFFFFF"/>
+                </a:solidFill>
+                <a:latin typeface="Calibri"/>
+              </a:rPr>
+              <a:t>•  Routing graph: METR-LA detector adjacency — 207 nodes, 1,515 edges, every edge instrumented.</a:t>
+            </a:r>
+          </a:p>
+        </p:txBody>
+      </p:sp>
+      <p:sp>
+        <p:nvSpPr>
+          <p:cNvPr id="7" name="Rounded Rectangle 6"/>
+          <p:cNvSpPr/>
+          <p:nvPr/>
+        </p:nvSpPr>
+        <p:spPr>
+          <a:xfrm>
+            <a:off x="6217920" y="777240"/>
+            <a:ext cx="5577840" cy="5029200"/>
+          </a:xfrm>
+          <a:prstGeom prst="roundRect">
+            <a:avLst/>
+          </a:prstGeom>
+          <a:solidFill>
+            <a:srgbClr val="2A357A"/>
+          </a:solidFill>
+          <a:ln>
+            <a:noFill/>
+          </a:ln>
+        </p:spPr>
+        <p:style>
+          <a:lnRef idx="1">
+            <a:schemeClr val="accent1"/>
+          </a:lnRef>
+          <a:fillRef idx="3">
+            <a:schemeClr val="accent1"/>
+          </a:fillRef>
+          <a:effectRef idx="2">
+            <a:schemeClr val="accent1"/>
+          </a:effectRef>
+          <a:fontRef idx="minor">
+            <a:schemeClr val="lt1"/>
+          </a:fontRef>
+        </p:style>
+        <p:txBody>
+          <a:bodyPr rtlCol="0" anchor="ctr"/>
+          <a:lstStyle/>
+          <a:p>
+            <a:pPr algn="ctr"/>
+          </a:p>
+        </p:txBody>
+      </p:sp>
+      <p:sp>
+        <p:nvSpPr>
+          <p:cNvPr id="8" name="TextBox 7"/>
+          <p:cNvSpPr txBox="1"/>
+          <p:nvPr/>
+        </p:nvSpPr>
+        <p:spPr>
+          <a:xfrm>
+            <a:off x="6446520" y="960120"/>
+            <a:ext cx="5120640" cy="320040"/>
+          </a:xfrm>
+          <a:prstGeom prst="rect">
+            <a:avLst/>
+          </a:prstGeom>
+          <a:noFill/>
+        </p:spPr>
+        <p:txBody>
+          <a:bodyPr wrap="square">
+            <a:spAutoFit/>
+          </a:bodyPr>
+          <a:lstStyle/>
+          <a:p>
             <a:pPr algn="l"/>
             <a:r>
-              <a:rPr sz="1400" b="0">
+              <a:rPr sz="1600" b="1">
+                <a:solidFill>
+                  <a:srgbClr val="E8A838"/>
+                </a:solidFill>
+                <a:latin typeface="Calibri"/>
+              </a:rPr>
+              <a:t>900-run design</a:t>
+            </a:r>
+          </a:p>
+        </p:txBody>
+      </p:sp>
+      <p:sp>
+        <p:nvSpPr>
+          <p:cNvPr id="9" name="TextBox 8"/>
+          <p:cNvSpPr txBox="1"/>
+          <p:nvPr/>
+        </p:nvSpPr>
+        <p:spPr>
+          <a:xfrm>
+            <a:off x="6446520" y="1417320"/>
+            <a:ext cx="5120640" cy="4114800"/>
+          </a:xfrm>
+          <a:prstGeom prst="rect">
+            <a:avLst/>
+          </a:prstGeom>
+          <a:noFill/>
+        </p:spPr>
+        <p:txBody>
+          <a:bodyPr wrap="square">
+            <a:spAutoFit/>
+          </a:bodyPr>
+          <a:lstStyle/>
+          <a:p>
+            <a:pPr algn="l">
+              <a:spcAft>
+                <a:spcPts val="1400"/>
+              </a:spcAft>
+            </a:pPr>
+            <a:r>
+              <a:rPr sz="1500">
                 <a:solidFill>
                   <a:srgbClr val="FFFFFF"/>
                 </a:solidFill>
                 <a:latin typeface="Calibri"/>
               </a:rPr>
-              <a:t>Left: % vs Dijkstra is flat across 5–20%.
-Incident ≈ 16% at every δ.
-Peak ≈ 1%. Off-peak ≈ 0%.
-Right: replans fall slightly as δ rises.
-Incidents ≈ 1 replan per trip.
-ANOVA: F ≈ 0.001, p = 1.00.
-The four policies tied on travel time.</a:t>
-            </a:r>
-          </a:p>
-        </p:txBody>
-      </p:sp>
-      <p:sp>
-        <p:nvSpPr>
-          <p:cNvPr id="8" name="Rectangle 7"/>
+              <a:t>•  75 origin–destination pairs (seed 42) × 3 scenarios × 4 δ values = 900 journeys.</a:t>
+            </a:r>
+          </a:p>
+          <a:p>
+            <a:pPr algn="l">
+              <a:spcAft>
+                <a:spcPts val="1400"/>
+              </a:spcAft>
+            </a:pPr>
+            <a:r>
+              <a:rPr sz="1500">
+                <a:solidFill>
+                  <a:srgbClr val="FFFFFF"/>
+                </a:solidFill>
+                <a:latin typeface="Calibri"/>
+              </a:rPr>
+              <a:t>•  Scenarios: peak (slowest quartile), off-peak (fastest quartile), incident (40% slowdown on the planned corridor).</a:t>
+            </a:r>
+          </a:p>
+          <a:p>
+            <a:pPr algn="l">
+              <a:spcAft>
+                <a:spcPts val="1400"/>
+              </a:spcAft>
+            </a:pPr>
+            <a:r>
+              <a:rPr sz="1500">
+                <a:solidFill>
+                  <a:srgbClr val="FFFFFF"/>
+                </a:solidFill>
+                <a:latin typeface="Calibri"/>
+              </a:rPr>
+              <a:t>•  Every method is walked on actual future speeds. Pairing is identical origin, destination, and clock.</a:t>
+            </a:r>
+          </a:p>
+          <a:p>
+            <a:pPr algn="l">
+              <a:spcAft>
+                <a:spcPts val="1400"/>
+              </a:spcAft>
+            </a:pPr>
+            <a:r>
+              <a:rPr sz="1500">
+                <a:solidFill>
+                  <a:srgbClr val="FFFFFF"/>
+                </a:solidFill>
+                <a:latin typeface="Calibri"/>
+              </a:rPr>
+              <a:t>•  B1 Dijkstra (current snapshot)  ·  B2 static A* (historical mean)  ·  B3 reactive A*  ·  B4 oracle.</a:t>
+            </a:r>
+          </a:p>
+        </p:txBody>
+      </p:sp>
+      <p:sp>
+        <p:nvSpPr>
+          <p:cNvPr id="10" name="Rectangle 9"/>
           <p:cNvSpPr/>
           <p:nvPr/>
         </p:nvSpPr>
@@ -9060,7 +9208,7 @@
       </p:sp>
       <p:sp>
         <p:nvSpPr>
-          <p:cNvPr id="9" name="TextBox 8"/>
+          <p:cNvPr id="11" name="TextBox 10"/>
           <p:cNvSpPr txBox="1"/>
           <p:nvPr/>
         </p:nvSpPr>
@@ -9094,7 +9242,7 @@
       </p:sp>
       <p:sp>
         <p:nvSpPr>
-          <p:cNvPr id="10" name="TextBox 9"/>
+          <p:cNvPr id="12" name="TextBox 11"/>
           <p:cNvSpPr txBox="1"/>
           <p:nvPr/>
         </p:nvSpPr>
@@ -9204,8 +9352,8 @@
         </p:nvSpPr>
         <p:spPr>
           <a:xfrm>
-            <a:off x="457200" y="256032"/>
-            <a:ext cx="10972800" cy="411480"/>
+            <a:off x="457200" y="201168"/>
+            <a:ext cx="10972800" cy="365760"/>
           </a:xfrm>
           <a:prstGeom prst="rect">
             <a:avLst/>
@@ -9226,7 +9374,7 @@
                 </a:solidFill>
                 <a:latin typeface="Cambria"/>
               </a:rPr>
-              <a:t>Recommended default: δ = 0.20</a:t>
+              <a:t>Objectives 1 and 2 — prediction</a:t>
             </a:r>
           </a:p>
         </p:txBody>
@@ -9239,8 +9387,8 @@
         </p:nvSpPr>
         <p:spPr>
           <a:xfrm>
-            <a:off x="457200" y="868680"/>
-            <a:ext cx="2788920" cy="566928"/>
+            <a:off x="411480" y="731520"/>
+            <a:ext cx="3657600" cy="1691640"/>
           </a:xfrm>
           <a:prstGeom prst="roundRect">
             <a:avLst/>
@@ -9282,8 +9430,8 @@
         </p:nvSpPr>
         <p:spPr>
           <a:xfrm>
-            <a:off x="457200" y="978407"/>
-            <a:ext cx="2788920" cy="365760"/>
+            <a:off x="502920" y="868680"/>
+            <a:ext cx="3474720" cy="640080"/>
           </a:xfrm>
           <a:prstGeom prst="rect">
             <a:avLst/>
@@ -9298,27 +9446,63 @@
           <a:p>
             <a:pPr algn="ctr"/>
             <a:r>
-              <a:rPr sz="1400" b="1">
+              <a:rPr sz="2800" b="1">
+                <a:solidFill>
+                  <a:srgbClr val="E8A838"/>
+                </a:solidFill>
+                <a:latin typeface="Cambria"/>
+              </a:rPr>
+              <a:t>3.48 mph</a:t>
+            </a:r>
+          </a:p>
+        </p:txBody>
+      </p:sp>
+      <p:sp>
+        <p:nvSpPr>
+          <p:cNvPr id="6" name="TextBox 5"/>
+          <p:cNvSpPr txBox="1"/>
+          <p:nvPr/>
+        </p:nvSpPr>
+        <p:spPr>
+          <a:xfrm>
+            <a:off x="502920" y="1554480"/>
+            <a:ext cx="3474720" cy="685800"/>
+          </a:xfrm>
+          <a:prstGeom prst="rect">
+            <a:avLst/>
+          </a:prstGeom>
+          <a:noFill/>
+        </p:spPr>
+        <p:txBody>
+          <a:bodyPr wrap="square">
+            <a:spAutoFit/>
+          </a:bodyPr>
+          <a:lstStyle/>
+          <a:p>
+            <a:pPr algn="ctr"/>
+            <a:r>
+              <a:rPr sz="1300" b="0">
                 <a:solidFill>
                   <a:srgbClr val="FFFFFF"/>
                 </a:solidFill>
                 <a:latin typeface="Calibri"/>
               </a:rPr>
-              <a:t>δ</a:t>
-            </a:r>
-          </a:p>
-        </p:txBody>
-      </p:sp>
-      <p:sp>
-        <p:nvSpPr>
-          <p:cNvPr id="6" name="Rounded Rectangle 5"/>
+              <a:t>METR-LA test MAE
+RMSE 6.04 mph  ·  27 epochs</a:t>
+            </a:r>
+          </a:p>
+        </p:txBody>
+      </p:sp>
+      <p:sp>
+        <p:nvSpPr>
+          <p:cNvPr id="7" name="Rounded Rectangle 6"/>
           <p:cNvSpPr/>
           <p:nvPr/>
         </p:nvSpPr>
         <p:spPr>
           <a:xfrm>
-            <a:off x="3337560" y="868680"/>
-            <a:ext cx="2788920" cy="566928"/>
+            <a:off x="4251960" y="731520"/>
+            <a:ext cx="3657600" cy="1691640"/>
           </a:xfrm>
           <a:prstGeom prst="roundRect">
             <a:avLst/>
@@ -9354,14 +9538,14 @@
       </p:sp>
       <p:sp>
         <p:nvSpPr>
-          <p:cNvPr id="7" name="TextBox 6"/>
+          <p:cNvPr id="8" name="TextBox 7"/>
           <p:cNvSpPr txBox="1"/>
           <p:nvPr/>
         </p:nvSpPr>
         <p:spPr>
           <a:xfrm>
-            <a:off x="3337560" y="978407"/>
-            <a:ext cx="2788920" cy="365760"/>
+            <a:off x="4343400" y="868680"/>
+            <a:ext cx="3474720" cy="640080"/>
           </a:xfrm>
           <a:prstGeom prst="rect">
             <a:avLst/>
@@ -9376,27 +9560,63 @@
           <a:p>
             <a:pPr algn="ctr"/>
             <a:r>
-              <a:rPr sz="1400" b="1">
+              <a:rPr sz="2800" b="1">
+                <a:solidFill>
+                  <a:srgbClr val="E8A838"/>
+                </a:solidFill>
+                <a:latin typeface="Cambria"/>
+              </a:rPr>
+              <a:t>2.38 mph</a:t>
+            </a:r>
+          </a:p>
+        </p:txBody>
+      </p:sp>
+      <p:sp>
+        <p:nvSpPr>
+          <p:cNvPr id="9" name="TextBox 8"/>
+          <p:cNvSpPr txBox="1"/>
+          <p:nvPr/>
+        </p:nvSpPr>
+        <p:spPr>
+          <a:xfrm>
+            <a:off x="4343400" y="1554480"/>
+            <a:ext cx="3474720" cy="685800"/>
+          </a:xfrm>
+          <a:prstGeom prst="rect">
+            <a:avLst/>
+          </a:prstGeom>
+          <a:noFill/>
+        </p:spPr>
+        <p:txBody>
+          <a:bodyPr wrap="square">
+            <a:spAutoFit/>
+          </a:bodyPr>
+          <a:lstStyle/>
+          <a:p>
+            <a:pPr algn="ctr"/>
+            <a:r>
+              <a:rPr sz="1300" b="0">
                 <a:solidFill>
                   <a:srgbClr val="FFFFFF"/>
                 </a:solidFill>
                 <a:latin typeface="Calibri"/>
               </a:rPr>
-              <a:t>Mean vs Dijkstra</a:t>
-            </a:r>
-          </a:p>
-        </p:txBody>
-      </p:sp>
-      <p:sp>
-        <p:nvSpPr>
-          <p:cNvPr id="8" name="Rounded Rectangle 7"/>
+              <a:t>PEMS-BAY test MAE
+separate model  ·  79 epochs</a:t>
+            </a:r>
+          </a:p>
+        </p:txBody>
+      </p:sp>
+      <p:sp>
+        <p:nvSpPr>
+          <p:cNvPr id="10" name="Rounded Rectangle 9"/>
           <p:cNvSpPr/>
           <p:nvPr/>
         </p:nvSpPr>
         <p:spPr>
           <a:xfrm>
-            <a:off x="6217920" y="868680"/>
-            <a:ext cx="2788920" cy="566928"/>
+            <a:off x="8092440" y="731520"/>
+            <a:ext cx="3657600" cy="1691640"/>
           </a:xfrm>
           <a:prstGeom prst="roundRect">
             <a:avLst/>
@@ -9432,14 +9652,14 @@
       </p:sp>
       <p:sp>
         <p:nvSpPr>
-          <p:cNvPr id="9" name="TextBox 8"/>
+          <p:cNvPr id="11" name="TextBox 10"/>
           <p:cNvSpPr txBox="1"/>
           <p:nvPr/>
         </p:nvSpPr>
         <p:spPr>
           <a:xfrm>
-            <a:off x="6217920" y="978407"/>
-            <a:ext cx="2788920" cy="365760"/>
+            <a:off x="8183880" y="868680"/>
+            <a:ext cx="3474720" cy="640080"/>
           </a:xfrm>
           <a:prstGeom prst="rect">
             <a:avLst/>
@@ -9454,27 +9674,63 @@
           <a:p>
             <a:pPr algn="ctr"/>
             <a:r>
-              <a:rPr sz="1400" b="1">
+              <a:rPr sz="2800" b="1">
+                <a:solidFill>
+                  <a:srgbClr val="E8A838"/>
+                </a:solidFill>
+                <a:latin typeface="Cambria"/>
+              </a:rPr>
+              <a:t>158 k</a:t>
+            </a:r>
+          </a:p>
+        </p:txBody>
+      </p:sp>
+      <p:sp>
+        <p:nvSpPr>
+          <p:cNvPr id="12" name="TextBox 11"/>
+          <p:cNvSpPr txBox="1"/>
+          <p:nvPr/>
+        </p:nvSpPr>
+        <p:spPr>
+          <a:xfrm>
+            <a:off x="8183880" y="1554480"/>
+            <a:ext cx="3474720" cy="685800"/>
+          </a:xfrm>
+          <a:prstGeom prst="rect">
+            <a:avLst/>
+          </a:prstGeom>
+          <a:noFill/>
+        </p:spPr>
+        <p:txBody>
+          <a:bodyPr wrap="square">
+            <a:spAutoFit/>
+          </a:bodyPr>
+          <a:lstStyle/>
+          <a:p>
+            <a:pPr algn="ctr"/>
+            <a:r>
+              <a:rPr sz="1300" b="0">
                 <a:solidFill>
                   <a:srgbClr val="FFFFFF"/>
                 </a:solidFill>
                 <a:latin typeface="Calibri"/>
               </a:rPr>
-              <a:t>Replans / journey</a:t>
-            </a:r>
-          </a:p>
-        </p:txBody>
-      </p:sp>
-      <p:sp>
-        <p:nvSpPr>
-          <p:cNvPr id="10" name="Rounded Rectangle 9"/>
+              <a:t>Trainable parameters
+2 × 64 GRU, dropout 0.2</a:t>
+            </a:r>
+          </a:p>
+        </p:txBody>
+      </p:sp>
+      <p:sp>
+        <p:nvSpPr>
+          <p:cNvPr id="13" name="Rounded Rectangle 12"/>
           <p:cNvSpPr/>
           <p:nvPr/>
         </p:nvSpPr>
         <p:spPr>
           <a:xfrm>
-            <a:off x="9098280" y="868680"/>
-            <a:ext cx="2788920" cy="566928"/>
+            <a:off x="411480" y="2651760"/>
+            <a:ext cx="11338560" cy="3154680"/>
           </a:xfrm>
           <a:prstGeom prst="roundRect">
             <a:avLst/>
@@ -9510,14 +9766,14 @@
       </p:sp>
       <p:sp>
         <p:nvSpPr>
-          <p:cNvPr id="11" name="TextBox 10"/>
+          <p:cNvPr id="14" name="TextBox 13"/>
           <p:cNvSpPr txBox="1"/>
           <p:nvPr/>
         </p:nvSpPr>
         <p:spPr>
           <a:xfrm>
-            <a:off x="9098280" y="978407"/>
-            <a:ext cx="2788920" cy="365760"/>
+            <a:off x="640080" y="2834640"/>
+            <a:ext cx="10972800" cy="320040"/>
           </a:xfrm>
           <a:prstGeom prst="rect">
             <a:avLst/>
@@ -9530,72 +9786,29 @@
           </a:bodyPr>
           <a:lstStyle/>
           <a:p>
-            <a:pPr algn="ctr"/>
-            <a:r>
-              <a:rPr sz="1400" b="1">
-                <a:solidFill>
-                  <a:srgbClr val="FFFFFF"/>
+            <a:pPr algn="l"/>
+            <a:r>
+              <a:rPr sz="1600" b="1">
+                <a:solidFill>
+                  <a:srgbClr val="E8A838"/>
                 </a:solidFill>
                 <a:latin typeface="Calibri"/>
               </a:rPr>
-              <a:t>TD-A* latency</a:t>
-            </a:r>
-          </a:p>
-        </p:txBody>
-      </p:sp>
-      <p:sp>
-        <p:nvSpPr>
-          <p:cNvPr id="12" name="Rounded Rectangle 11"/>
-          <p:cNvSpPr/>
-          <p:nvPr/>
-        </p:nvSpPr>
-        <p:spPr>
-          <a:xfrm>
-            <a:off x="457200" y="1508760"/>
-            <a:ext cx="2788920" cy="566928"/>
-          </a:xfrm>
-          <a:prstGeom prst="roundRect">
-            <a:avLst/>
-          </a:prstGeom>
-          <a:solidFill>
-            <a:srgbClr val="242E6E"/>
-          </a:solidFill>
-          <a:ln>
-            <a:noFill/>
-          </a:ln>
-        </p:spPr>
-        <p:style>
-          <a:lnRef idx="1">
-            <a:schemeClr val="accent1"/>
-          </a:lnRef>
-          <a:fillRef idx="3">
-            <a:schemeClr val="accent1"/>
-          </a:fillRef>
-          <a:effectRef idx="2">
-            <a:schemeClr val="accent1"/>
-          </a:effectRef>
-          <a:fontRef idx="minor">
-            <a:schemeClr val="lt1"/>
-          </a:fontRef>
-        </p:style>
-        <p:txBody>
-          <a:bodyPr rtlCol="0" anchor="ctr"/>
-          <a:lstStyle/>
-          <a:p>
-            <a:pPr algn="ctr"/>
-          </a:p>
-        </p:txBody>
-      </p:sp>
-      <p:sp>
-        <p:nvSpPr>
-          <p:cNvPr id="13" name="TextBox 12"/>
+              <a:t>What this means for routing</a:t>
+            </a:r>
+          </a:p>
+        </p:txBody>
+      </p:sp>
+      <p:sp>
+        <p:nvSpPr>
+          <p:cNvPr id="15" name="TextBox 14"/>
           <p:cNvSpPr txBox="1"/>
           <p:nvPr/>
         </p:nvSpPr>
         <p:spPr>
           <a:xfrm>
-            <a:off x="457200" y="1618488"/>
-            <a:ext cx="2788920" cy="365760"/>
+            <a:off x="640080" y="3246120"/>
+            <a:ext cx="10881360" cy="2331720"/>
           </a:xfrm>
           <a:prstGeom prst="rect">
             <a:avLst/>
@@ -9608,889 +9821,83 @@
           </a:bodyPr>
           <a:lstStyle/>
           <a:p>
-            <a:pPr algn="ctr"/>
-            <a:r>
-              <a:rPr sz="1400" b="1">
+            <a:pPr algn="l">
+              <a:spcAft>
+                <a:spcPts val="1000"/>
+              </a:spcAft>
+            </a:pPr>
+            <a:r>
+              <a:rPr sz="1500">
                 <a:solidFill>
                   <a:srgbClr val="FFFFFF"/>
                 </a:solidFill>
                 <a:latin typeface="Calibri"/>
               </a:rPr>
-              <a:t>0.05</a:t>
-            </a:r>
-          </a:p>
-        </p:txBody>
-      </p:sp>
-      <p:sp>
-        <p:nvSpPr>
-          <p:cNvPr id="14" name="Rounded Rectangle 13"/>
+              <a:t>•  A 3.48 mph error on freeway speeds is small enough to rank corridors, not to replace a dispatcher.</a:t>
+            </a:r>
+          </a:p>
+          <a:p>
+            <a:pPr algn="l">
+              <a:spcAft>
+                <a:spcPts val="1000"/>
+              </a:spcAft>
+            </a:pPr>
+            <a:r>
+              <a:rPr sz="1500">
+                <a:solidFill>
+                  <a:srgbClr val="FFFFFF"/>
+                </a:solidFill>
+                <a:latin typeface="Calibri"/>
+              </a:rPr>
+              <a:t>•  PEMS-BAY confirms the architecture in a second city. It is not a second 900-run routing city.</a:t>
+            </a:r>
+          </a:p>
+          <a:p>
+            <a:pPr algn="l">
+              <a:spcAft>
+                <a:spcPts val="1000"/>
+              </a:spcAft>
+            </a:pPr>
+            <a:r>
+              <a:rPr sz="1500">
+                <a:solidFill>
+                  <a:srgbClr val="FFFFFF"/>
+                </a:solidFill>
+                <a:latin typeface="Calibri"/>
+              </a:rPr>
+              <a:t>•  Input window 60 minutes; forecast horizon 30 minutes — matched to a typical urban emergency trip.</a:t>
+            </a:r>
+          </a:p>
+          <a:p>
+            <a:pPr algn="l">
+              <a:spcAft>
+                <a:spcPts val="1000"/>
+              </a:spcAft>
+            </a:pPr>
+            <a:r>
+              <a:rPr sz="1500">
+                <a:solidFill>
+                  <a:srgbClr val="FFFFFF"/>
+                </a:solidFill>
+                <a:latin typeface="Calibri"/>
+              </a:rPr>
+              <a:t>•  The defended METR-LA checkpoint is the 27-epoch model (MAE 3.48 mph) used for the 900 journeys.</a:t>
+            </a:r>
+          </a:p>
+        </p:txBody>
+      </p:sp>
+      <p:sp>
+        <p:nvSpPr>
+          <p:cNvPr id="16" name="Rectangle 15"/>
           <p:cNvSpPr/>
           <p:nvPr/>
         </p:nvSpPr>
         <p:spPr>
           <a:xfrm>
-            <a:off x="3337560" y="1508760"/>
-            <a:ext cx="2788920" cy="566928"/>
-          </a:xfrm>
-          <a:prstGeom prst="roundRect">
-            <a:avLst/>
-          </a:prstGeom>
-          <a:solidFill>
-            <a:srgbClr val="242E6E"/>
-          </a:solidFill>
-          <a:ln>
-            <a:noFill/>
-          </a:ln>
-        </p:spPr>
-        <p:style>
-          <a:lnRef idx="1">
-            <a:schemeClr val="accent1"/>
-          </a:lnRef>
-          <a:fillRef idx="3">
-            <a:schemeClr val="accent1"/>
-          </a:fillRef>
-          <a:effectRef idx="2">
-            <a:schemeClr val="accent1"/>
-          </a:effectRef>
-          <a:fontRef idx="minor">
-            <a:schemeClr val="lt1"/>
-          </a:fontRef>
-        </p:style>
-        <p:txBody>
-          <a:bodyPr rtlCol="0" anchor="ctr"/>
-          <a:lstStyle/>
-          <a:p>
-            <a:pPr algn="ctr"/>
-          </a:p>
-        </p:txBody>
-      </p:sp>
-      <p:sp>
-        <p:nvSpPr>
-          <p:cNvPr id="15" name="TextBox 14"/>
-          <p:cNvSpPr txBox="1"/>
-          <p:nvPr/>
-        </p:nvSpPr>
-        <p:spPr>
-          <a:xfrm>
-            <a:off x="3337560" y="1618488"/>
-            <a:ext cx="2788920" cy="365760"/>
-          </a:xfrm>
-          <a:prstGeom prst="rect">
-            <a:avLst/>
-          </a:prstGeom>
-          <a:noFill/>
-        </p:spPr>
-        <p:txBody>
-          <a:bodyPr wrap="square">
-            <a:spAutoFit/>
-          </a:bodyPr>
-          <a:lstStyle/>
-          <a:p>
-            <a:pPr algn="ctr"/>
-            <a:r>
-              <a:rPr sz="1400" b="1">
-                <a:solidFill>
-                  <a:srgbClr val="FFFFFF"/>
-                </a:solidFill>
-                <a:latin typeface="Calibri"/>
-              </a:rPr>
-              <a:t>+5.726%</a:t>
-            </a:r>
-          </a:p>
-        </p:txBody>
-      </p:sp>
-      <p:sp>
-        <p:nvSpPr>
-          <p:cNvPr id="16" name="Rounded Rectangle 15"/>
-          <p:cNvSpPr/>
-          <p:nvPr/>
-        </p:nvSpPr>
-        <p:spPr>
-          <a:xfrm>
-            <a:off x="6217920" y="1508760"/>
-            <a:ext cx="2788920" cy="566928"/>
-          </a:xfrm>
-          <a:prstGeom prst="roundRect">
-            <a:avLst/>
-          </a:prstGeom>
-          <a:solidFill>
-            <a:srgbClr val="242E6E"/>
-          </a:solidFill>
-          <a:ln>
-            <a:noFill/>
-          </a:ln>
-        </p:spPr>
-        <p:style>
-          <a:lnRef idx="1">
-            <a:schemeClr val="accent1"/>
-          </a:lnRef>
-          <a:fillRef idx="3">
-            <a:schemeClr val="accent1"/>
-          </a:fillRef>
-          <a:effectRef idx="2">
-            <a:schemeClr val="accent1"/>
-          </a:effectRef>
-          <a:fontRef idx="minor">
-            <a:schemeClr val="lt1"/>
-          </a:fontRef>
-        </p:style>
-        <p:txBody>
-          <a:bodyPr rtlCol="0" anchor="ctr"/>
-          <a:lstStyle/>
-          <a:p>
-            <a:pPr algn="ctr"/>
-          </a:p>
-        </p:txBody>
-      </p:sp>
-      <p:sp>
-        <p:nvSpPr>
-          <p:cNvPr id="17" name="TextBox 16"/>
-          <p:cNvSpPr txBox="1"/>
-          <p:nvPr/>
-        </p:nvSpPr>
-        <p:spPr>
-          <a:xfrm>
-            <a:off x="6217920" y="1618488"/>
-            <a:ext cx="2788920" cy="365760"/>
-          </a:xfrm>
-          <a:prstGeom prst="rect">
-            <a:avLst/>
-          </a:prstGeom>
-          <a:noFill/>
-        </p:spPr>
-        <p:txBody>
-          <a:bodyPr wrap="square">
-            <a:spAutoFit/>
-          </a:bodyPr>
-          <a:lstStyle/>
-          <a:p>
-            <a:pPr algn="ctr"/>
-            <a:r>
-              <a:rPr sz="1400" b="1">
-                <a:solidFill>
-                  <a:srgbClr val="FFFFFF"/>
-                </a:solidFill>
-                <a:latin typeface="Calibri"/>
-              </a:rPr>
-              <a:t>0.45</a:t>
-            </a:r>
-          </a:p>
-        </p:txBody>
-      </p:sp>
-      <p:sp>
-        <p:nvSpPr>
-          <p:cNvPr id="18" name="Rounded Rectangle 17"/>
-          <p:cNvSpPr/>
-          <p:nvPr/>
-        </p:nvSpPr>
-        <p:spPr>
-          <a:xfrm>
-            <a:off x="9098280" y="1508760"/>
-            <a:ext cx="2788920" cy="566928"/>
-          </a:xfrm>
-          <a:prstGeom prst="roundRect">
-            <a:avLst/>
-          </a:prstGeom>
-          <a:solidFill>
-            <a:srgbClr val="242E6E"/>
-          </a:solidFill>
-          <a:ln>
-            <a:noFill/>
-          </a:ln>
-        </p:spPr>
-        <p:style>
-          <a:lnRef idx="1">
-            <a:schemeClr val="accent1"/>
-          </a:lnRef>
-          <a:fillRef idx="3">
-            <a:schemeClr val="accent1"/>
-          </a:fillRef>
-          <a:effectRef idx="2">
-            <a:schemeClr val="accent1"/>
-          </a:effectRef>
-          <a:fontRef idx="minor">
-            <a:schemeClr val="lt1"/>
-          </a:fontRef>
-        </p:style>
-        <p:txBody>
-          <a:bodyPr rtlCol="0" anchor="ctr"/>
-          <a:lstStyle/>
-          <a:p>
-            <a:pPr algn="ctr"/>
-          </a:p>
-        </p:txBody>
-      </p:sp>
-      <p:sp>
-        <p:nvSpPr>
-          <p:cNvPr id="19" name="TextBox 18"/>
-          <p:cNvSpPr txBox="1"/>
-          <p:nvPr/>
-        </p:nvSpPr>
-        <p:spPr>
-          <a:xfrm>
-            <a:off x="9098280" y="1618488"/>
-            <a:ext cx="2788920" cy="365760"/>
-          </a:xfrm>
-          <a:prstGeom prst="rect">
-            <a:avLst/>
-          </a:prstGeom>
-          <a:noFill/>
-        </p:spPr>
-        <p:txBody>
-          <a:bodyPr wrap="square">
-            <a:spAutoFit/>
-          </a:bodyPr>
-          <a:lstStyle/>
-          <a:p>
-            <a:pPr algn="ctr"/>
-            <a:r>
-              <a:rPr sz="1400" b="1">
-                <a:solidFill>
-                  <a:srgbClr val="FFFFFF"/>
-                </a:solidFill>
-                <a:latin typeface="Calibri"/>
-              </a:rPr>
-              <a:t>0.37 ms</a:t>
-            </a:r>
-          </a:p>
-        </p:txBody>
-      </p:sp>
-      <p:sp>
-        <p:nvSpPr>
-          <p:cNvPr id="20" name="Rounded Rectangle 19"/>
-          <p:cNvSpPr/>
-          <p:nvPr/>
-        </p:nvSpPr>
-        <p:spPr>
-          <a:xfrm>
-            <a:off x="457200" y="2148839"/>
-            <a:ext cx="2788920" cy="566928"/>
-          </a:xfrm>
-          <a:prstGeom prst="roundRect">
-            <a:avLst/>
-          </a:prstGeom>
-          <a:solidFill>
-            <a:srgbClr val="242E6E"/>
-          </a:solidFill>
-          <a:ln>
-            <a:noFill/>
-          </a:ln>
-        </p:spPr>
-        <p:style>
-          <a:lnRef idx="1">
-            <a:schemeClr val="accent1"/>
-          </a:lnRef>
-          <a:fillRef idx="3">
-            <a:schemeClr val="accent1"/>
-          </a:fillRef>
-          <a:effectRef idx="2">
-            <a:schemeClr val="accent1"/>
-          </a:effectRef>
-          <a:fontRef idx="minor">
-            <a:schemeClr val="lt1"/>
-          </a:fontRef>
-        </p:style>
-        <p:txBody>
-          <a:bodyPr rtlCol="0" anchor="ctr"/>
-          <a:lstStyle/>
-          <a:p>
-            <a:pPr algn="ctr"/>
-          </a:p>
-        </p:txBody>
-      </p:sp>
-      <p:sp>
-        <p:nvSpPr>
-          <p:cNvPr id="21" name="TextBox 20"/>
-          <p:cNvSpPr txBox="1"/>
-          <p:nvPr/>
-        </p:nvSpPr>
-        <p:spPr>
-          <a:xfrm>
-            <a:off x="457200" y="2258568"/>
-            <a:ext cx="2788920" cy="365760"/>
-          </a:xfrm>
-          <a:prstGeom prst="rect">
-            <a:avLst/>
-          </a:prstGeom>
-          <a:noFill/>
-        </p:spPr>
-        <p:txBody>
-          <a:bodyPr wrap="square">
-            <a:spAutoFit/>
-          </a:bodyPr>
-          <a:lstStyle/>
-          <a:p>
-            <a:pPr algn="ctr"/>
-            <a:r>
-              <a:rPr sz="1400" b="1">
-                <a:solidFill>
-                  <a:srgbClr val="FFFFFF"/>
-                </a:solidFill>
-                <a:latin typeface="Calibri"/>
-              </a:rPr>
-              <a:t>0.10</a:t>
-            </a:r>
-          </a:p>
-        </p:txBody>
-      </p:sp>
-      <p:sp>
-        <p:nvSpPr>
-          <p:cNvPr id="22" name="Rounded Rectangle 21"/>
-          <p:cNvSpPr/>
-          <p:nvPr/>
-        </p:nvSpPr>
-        <p:spPr>
-          <a:xfrm>
-            <a:off x="3337560" y="2148839"/>
-            <a:ext cx="2788920" cy="566928"/>
-          </a:xfrm>
-          <a:prstGeom prst="roundRect">
-            <a:avLst/>
-          </a:prstGeom>
-          <a:solidFill>
-            <a:srgbClr val="242E6E"/>
-          </a:solidFill>
-          <a:ln>
-            <a:noFill/>
-          </a:ln>
-        </p:spPr>
-        <p:style>
-          <a:lnRef idx="1">
-            <a:schemeClr val="accent1"/>
-          </a:lnRef>
-          <a:fillRef idx="3">
-            <a:schemeClr val="accent1"/>
-          </a:fillRef>
-          <a:effectRef idx="2">
-            <a:schemeClr val="accent1"/>
-          </a:effectRef>
-          <a:fontRef idx="minor">
-            <a:schemeClr val="lt1"/>
-          </a:fontRef>
-        </p:style>
-        <p:txBody>
-          <a:bodyPr rtlCol="0" anchor="ctr"/>
-          <a:lstStyle/>
-          <a:p>
-            <a:pPr algn="ctr"/>
-          </a:p>
-        </p:txBody>
-      </p:sp>
-      <p:sp>
-        <p:nvSpPr>
-          <p:cNvPr id="23" name="TextBox 22"/>
-          <p:cNvSpPr txBox="1"/>
-          <p:nvPr/>
-        </p:nvSpPr>
-        <p:spPr>
-          <a:xfrm>
-            <a:off x="3337560" y="2258568"/>
-            <a:ext cx="2788920" cy="365760"/>
-          </a:xfrm>
-          <a:prstGeom prst="rect">
-            <a:avLst/>
-          </a:prstGeom>
-          <a:noFill/>
-        </p:spPr>
-        <p:txBody>
-          <a:bodyPr wrap="square">
-            <a:spAutoFit/>
-          </a:bodyPr>
-          <a:lstStyle/>
-          <a:p>
-            <a:pPr algn="ctr"/>
-            <a:r>
-              <a:rPr sz="1400" b="1">
-                <a:solidFill>
-                  <a:srgbClr val="FFFFFF"/>
-                </a:solidFill>
-                <a:latin typeface="Calibri"/>
-              </a:rPr>
-              <a:t>+5.748%</a:t>
-            </a:r>
-          </a:p>
-        </p:txBody>
-      </p:sp>
-      <p:sp>
-        <p:nvSpPr>
-          <p:cNvPr id="24" name="Rounded Rectangle 23"/>
-          <p:cNvSpPr/>
-          <p:nvPr/>
-        </p:nvSpPr>
-        <p:spPr>
-          <a:xfrm>
-            <a:off x="6217920" y="2148839"/>
-            <a:ext cx="2788920" cy="566928"/>
-          </a:xfrm>
-          <a:prstGeom prst="roundRect">
-            <a:avLst/>
-          </a:prstGeom>
-          <a:solidFill>
-            <a:srgbClr val="242E6E"/>
-          </a:solidFill>
-          <a:ln>
-            <a:noFill/>
-          </a:ln>
-        </p:spPr>
-        <p:style>
-          <a:lnRef idx="1">
-            <a:schemeClr val="accent1"/>
-          </a:lnRef>
-          <a:fillRef idx="3">
-            <a:schemeClr val="accent1"/>
-          </a:fillRef>
-          <a:effectRef idx="2">
-            <a:schemeClr val="accent1"/>
-          </a:effectRef>
-          <a:fontRef idx="minor">
-            <a:schemeClr val="lt1"/>
-          </a:fontRef>
-        </p:style>
-        <p:txBody>
-          <a:bodyPr rtlCol="0" anchor="ctr"/>
-          <a:lstStyle/>
-          <a:p>
-            <a:pPr algn="ctr"/>
-          </a:p>
-        </p:txBody>
-      </p:sp>
-      <p:sp>
-        <p:nvSpPr>
-          <p:cNvPr id="25" name="TextBox 24"/>
-          <p:cNvSpPr txBox="1"/>
-          <p:nvPr/>
-        </p:nvSpPr>
-        <p:spPr>
-          <a:xfrm>
-            <a:off x="6217920" y="2258568"/>
-            <a:ext cx="2788920" cy="365760"/>
-          </a:xfrm>
-          <a:prstGeom prst="rect">
-            <a:avLst/>
-          </a:prstGeom>
-          <a:noFill/>
-        </p:spPr>
-        <p:txBody>
-          <a:bodyPr wrap="square">
-            <a:spAutoFit/>
-          </a:bodyPr>
-          <a:lstStyle/>
-          <a:p>
-            <a:pPr algn="ctr"/>
-            <a:r>
-              <a:rPr sz="1400" b="1">
-                <a:solidFill>
-                  <a:srgbClr val="FFFFFF"/>
-                </a:solidFill>
-                <a:latin typeface="Calibri"/>
-              </a:rPr>
-              <a:t>0.44</a:t>
-            </a:r>
-          </a:p>
-        </p:txBody>
-      </p:sp>
-      <p:sp>
-        <p:nvSpPr>
-          <p:cNvPr id="26" name="Rounded Rectangle 25"/>
-          <p:cNvSpPr/>
-          <p:nvPr/>
-        </p:nvSpPr>
-        <p:spPr>
-          <a:xfrm>
-            <a:off x="9098280" y="2148839"/>
-            <a:ext cx="2788920" cy="566928"/>
-          </a:xfrm>
-          <a:prstGeom prst="roundRect">
-            <a:avLst/>
-          </a:prstGeom>
-          <a:solidFill>
-            <a:srgbClr val="242E6E"/>
-          </a:solidFill>
-          <a:ln>
-            <a:noFill/>
-          </a:ln>
-        </p:spPr>
-        <p:style>
-          <a:lnRef idx="1">
-            <a:schemeClr val="accent1"/>
-          </a:lnRef>
-          <a:fillRef idx="3">
-            <a:schemeClr val="accent1"/>
-          </a:fillRef>
-          <a:effectRef idx="2">
-            <a:schemeClr val="accent1"/>
-          </a:effectRef>
-          <a:fontRef idx="minor">
-            <a:schemeClr val="lt1"/>
-          </a:fontRef>
-        </p:style>
-        <p:txBody>
-          <a:bodyPr rtlCol="0" anchor="ctr"/>
-          <a:lstStyle/>
-          <a:p>
-            <a:pPr algn="ctr"/>
-          </a:p>
-        </p:txBody>
-      </p:sp>
-      <p:sp>
-        <p:nvSpPr>
-          <p:cNvPr id="27" name="TextBox 26"/>
-          <p:cNvSpPr txBox="1"/>
-          <p:nvPr/>
-        </p:nvSpPr>
-        <p:spPr>
-          <a:xfrm>
-            <a:off x="9098280" y="2258568"/>
-            <a:ext cx="2788920" cy="365760"/>
-          </a:xfrm>
-          <a:prstGeom prst="rect">
-            <a:avLst/>
-          </a:prstGeom>
-          <a:noFill/>
-        </p:spPr>
-        <p:txBody>
-          <a:bodyPr wrap="square">
-            <a:spAutoFit/>
-          </a:bodyPr>
-          <a:lstStyle/>
-          <a:p>
-            <a:pPr algn="ctr"/>
-            <a:r>
-              <a:rPr sz="1400" b="1">
-                <a:solidFill>
-                  <a:srgbClr val="FFFFFF"/>
-                </a:solidFill>
-                <a:latin typeface="Calibri"/>
-              </a:rPr>
-              <a:t>0.37 ms</a:t>
-            </a:r>
-          </a:p>
-        </p:txBody>
-      </p:sp>
-      <p:sp>
-        <p:nvSpPr>
-          <p:cNvPr id="28" name="Rounded Rectangle 27"/>
-          <p:cNvSpPr/>
-          <p:nvPr/>
-        </p:nvSpPr>
-        <p:spPr>
-          <a:xfrm>
-            <a:off x="457200" y="2788920"/>
-            <a:ext cx="2788920" cy="566928"/>
-          </a:xfrm>
-          <a:prstGeom prst="roundRect">
-            <a:avLst/>
-          </a:prstGeom>
-          <a:solidFill>
-            <a:srgbClr val="242E6E"/>
-          </a:solidFill>
-          <a:ln>
-            <a:noFill/>
-          </a:ln>
-        </p:spPr>
-        <p:style>
-          <a:lnRef idx="1">
-            <a:schemeClr val="accent1"/>
-          </a:lnRef>
-          <a:fillRef idx="3">
-            <a:schemeClr val="accent1"/>
-          </a:fillRef>
-          <a:effectRef idx="2">
-            <a:schemeClr val="accent1"/>
-          </a:effectRef>
-          <a:fontRef idx="minor">
-            <a:schemeClr val="lt1"/>
-          </a:fontRef>
-        </p:style>
-        <p:txBody>
-          <a:bodyPr rtlCol="0" anchor="ctr"/>
-          <a:lstStyle/>
-          <a:p>
-            <a:pPr algn="ctr"/>
-          </a:p>
-        </p:txBody>
-      </p:sp>
-      <p:sp>
-        <p:nvSpPr>
-          <p:cNvPr id="29" name="TextBox 28"/>
-          <p:cNvSpPr txBox="1"/>
-          <p:nvPr/>
-        </p:nvSpPr>
-        <p:spPr>
-          <a:xfrm>
-            <a:off x="457200" y="2898648"/>
-            <a:ext cx="2788920" cy="365760"/>
-          </a:xfrm>
-          <a:prstGeom prst="rect">
-            <a:avLst/>
-          </a:prstGeom>
-          <a:noFill/>
-        </p:spPr>
-        <p:txBody>
-          <a:bodyPr wrap="square">
-            <a:spAutoFit/>
-          </a:bodyPr>
-          <a:lstStyle/>
-          <a:p>
-            <a:pPr algn="ctr"/>
-            <a:r>
-              <a:rPr sz="1400" b="1">
-                <a:solidFill>
-                  <a:srgbClr val="FFFFFF"/>
-                </a:solidFill>
-                <a:latin typeface="Calibri"/>
-              </a:rPr>
-              <a:t>0.15</a:t>
-            </a:r>
-          </a:p>
-        </p:txBody>
-      </p:sp>
-      <p:sp>
-        <p:nvSpPr>
-          <p:cNvPr id="30" name="Rounded Rectangle 29"/>
-          <p:cNvSpPr/>
-          <p:nvPr/>
-        </p:nvSpPr>
-        <p:spPr>
-          <a:xfrm>
-            <a:off x="3337560" y="2788920"/>
-            <a:ext cx="2788920" cy="566928"/>
-          </a:xfrm>
-          <a:prstGeom prst="roundRect">
-            <a:avLst/>
-          </a:prstGeom>
-          <a:solidFill>
-            <a:srgbClr val="242E6E"/>
-          </a:solidFill>
-          <a:ln>
-            <a:noFill/>
-          </a:ln>
-        </p:spPr>
-        <p:style>
-          <a:lnRef idx="1">
-            <a:schemeClr val="accent1"/>
-          </a:lnRef>
-          <a:fillRef idx="3">
-            <a:schemeClr val="accent1"/>
-          </a:fillRef>
-          <a:effectRef idx="2">
-            <a:schemeClr val="accent1"/>
-          </a:effectRef>
-          <a:fontRef idx="minor">
-            <a:schemeClr val="lt1"/>
-          </a:fontRef>
-        </p:style>
-        <p:txBody>
-          <a:bodyPr rtlCol="0" anchor="ctr"/>
-          <a:lstStyle/>
-          <a:p>
-            <a:pPr algn="ctr"/>
-          </a:p>
-        </p:txBody>
-      </p:sp>
-      <p:sp>
-        <p:nvSpPr>
-          <p:cNvPr id="31" name="TextBox 30"/>
-          <p:cNvSpPr txBox="1"/>
-          <p:nvPr/>
-        </p:nvSpPr>
-        <p:spPr>
-          <a:xfrm>
-            <a:off x="3337560" y="2898648"/>
-            <a:ext cx="2788920" cy="365760"/>
-          </a:xfrm>
-          <a:prstGeom prst="rect">
-            <a:avLst/>
-          </a:prstGeom>
-          <a:noFill/>
-        </p:spPr>
-        <p:txBody>
-          <a:bodyPr wrap="square">
-            <a:spAutoFit/>
-          </a:bodyPr>
-          <a:lstStyle/>
-          <a:p>
-            <a:pPr algn="ctr"/>
-            <a:r>
-              <a:rPr sz="1400" b="1">
-                <a:solidFill>
-                  <a:srgbClr val="FFFFFF"/>
-                </a:solidFill>
-                <a:latin typeface="Calibri"/>
-              </a:rPr>
-              <a:t>+5.726%</a:t>
-            </a:r>
-          </a:p>
-        </p:txBody>
-      </p:sp>
-      <p:sp>
-        <p:nvSpPr>
-          <p:cNvPr id="32" name="Rounded Rectangle 31"/>
-          <p:cNvSpPr/>
-          <p:nvPr/>
-        </p:nvSpPr>
-        <p:spPr>
-          <a:xfrm>
-            <a:off x="6217920" y="2788920"/>
-            <a:ext cx="2788920" cy="566928"/>
-          </a:xfrm>
-          <a:prstGeom prst="roundRect">
-            <a:avLst/>
-          </a:prstGeom>
-          <a:solidFill>
-            <a:srgbClr val="242E6E"/>
-          </a:solidFill>
-          <a:ln>
-            <a:noFill/>
-          </a:ln>
-        </p:spPr>
-        <p:style>
-          <a:lnRef idx="1">
-            <a:schemeClr val="accent1"/>
-          </a:lnRef>
-          <a:fillRef idx="3">
-            <a:schemeClr val="accent1"/>
-          </a:fillRef>
-          <a:effectRef idx="2">
-            <a:schemeClr val="accent1"/>
-          </a:effectRef>
-          <a:fontRef idx="minor">
-            <a:schemeClr val="lt1"/>
-          </a:fontRef>
-        </p:style>
-        <p:txBody>
-          <a:bodyPr rtlCol="0" anchor="ctr"/>
-          <a:lstStyle/>
-          <a:p>
-            <a:pPr algn="ctr"/>
-          </a:p>
-        </p:txBody>
-      </p:sp>
-      <p:sp>
-        <p:nvSpPr>
-          <p:cNvPr id="33" name="TextBox 32"/>
-          <p:cNvSpPr txBox="1"/>
-          <p:nvPr/>
-        </p:nvSpPr>
-        <p:spPr>
-          <a:xfrm>
-            <a:off x="6217920" y="2898648"/>
-            <a:ext cx="2788920" cy="365760"/>
-          </a:xfrm>
-          <a:prstGeom prst="rect">
-            <a:avLst/>
-          </a:prstGeom>
-          <a:noFill/>
-        </p:spPr>
-        <p:txBody>
-          <a:bodyPr wrap="square">
-            <a:spAutoFit/>
-          </a:bodyPr>
-          <a:lstStyle/>
-          <a:p>
-            <a:pPr algn="ctr"/>
-            <a:r>
-              <a:rPr sz="1400" b="1">
-                <a:solidFill>
-                  <a:srgbClr val="FFFFFF"/>
-                </a:solidFill>
-                <a:latin typeface="Calibri"/>
-              </a:rPr>
-              <a:t>0.43</a:t>
-            </a:r>
-          </a:p>
-        </p:txBody>
-      </p:sp>
-      <p:sp>
-        <p:nvSpPr>
-          <p:cNvPr id="34" name="Rounded Rectangle 33"/>
-          <p:cNvSpPr/>
-          <p:nvPr/>
-        </p:nvSpPr>
-        <p:spPr>
-          <a:xfrm>
-            <a:off x="9098280" y="2788920"/>
-            <a:ext cx="2788920" cy="566928"/>
-          </a:xfrm>
-          <a:prstGeom prst="roundRect">
-            <a:avLst/>
-          </a:prstGeom>
-          <a:solidFill>
-            <a:srgbClr val="242E6E"/>
-          </a:solidFill>
-          <a:ln>
-            <a:noFill/>
-          </a:ln>
-        </p:spPr>
-        <p:style>
-          <a:lnRef idx="1">
-            <a:schemeClr val="accent1"/>
-          </a:lnRef>
-          <a:fillRef idx="3">
-            <a:schemeClr val="accent1"/>
-          </a:fillRef>
-          <a:effectRef idx="2">
-            <a:schemeClr val="accent1"/>
-          </a:effectRef>
-          <a:fontRef idx="minor">
-            <a:schemeClr val="lt1"/>
-          </a:fontRef>
-        </p:style>
-        <p:txBody>
-          <a:bodyPr rtlCol="0" anchor="ctr"/>
-          <a:lstStyle/>
-          <a:p>
-            <a:pPr algn="ctr"/>
-          </a:p>
-        </p:txBody>
-      </p:sp>
-      <p:sp>
-        <p:nvSpPr>
-          <p:cNvPr id="35" name="TextBox 34"/>
-          <p:cNvSpPr txBox="1"/>
-          <p:nvPr/>
-        </p:nvSpPr>
-        <p:spPr>
-          <a:xfrm>
-            <a:off x="9098280" y="2898648"/>
-            <a:ext cx="2788920" cy="365760"/>
-          </a:xfrm>
-          <a:prstGeom prst="rect">
-            <a:avLst/>
-          </a:prstGeom>
-          <a:noFill/>
-        </p:spPr>
-        <p:txBody>
-          <a:bodyPr wrap="square">
-            <a:spAutoFit/>
-          </a:bodyPr>
-          <a:lstStyle/>
-          <a:p>
-            <a:pPr algn="ctr"/>
-            <a:r>
-              <a:rPr sz="1400" b="1">
-                <a:solidFill>
-                  <a:srgbClr val="FFFFFF"/>
-                </a:solidFill>
-                <a:latin typeface="Calibri"/>
-              </a:rPr>
-              <a:t>0.37 ms</a:t>
-            </a:r>
-          </a:p>
-        </p:txBody>
-      </p:sp>
-      <p:sp>
-        <p:nvSpPr>
-          <p:cNvPr id="36" name="Rounded Rectangle 35"/>
-          <p:cNvSpPr/>
-          <p:nvPr/>
-        </p:nvSpPr>
-        <p:spPr>
-          <a:xfrm>
-            <a:off x="457200" y="3429000"/>
-            <a:ext cx="2788920" cy="566928"/>
-          </a:xfrm>
-          <a:prstGeom prst="roundRect">
+            <a:off x="0" y="6748272"/>
+            <a:ext cx="12191695" cy="109728"/>
+          </a:xfrm>
+          <a:prstGeom prst="rect">
             <a:avLst/>
           </a:prstGeom>
           <a:solidFill>
@@ -10524,398 +9931,7 @@
       </p:sp>
       <p:sp>
         <p:nvSpPr>
-          <p:cNvPr id="37" name="TextBox 36"/>
-          <p:cNvSpPr txBox="1"/>
-          <p:nvPr/>
-        </p:nvSpPr>
-        <p:spPr>
-          <a:xfrm>
-            <a:off x="457200" y="3538728"/>
-            <a:ext cx="2788920" cy="365760"/>
-          </a:xfrm>
-          <a:prstGeom prst="rect">
-            <a:avLst/>
-          </a:prstGeom>
-          <a:noFill/>
-        </p:spPr>
-        <p:txBody>
-          <a:bodyPr wrap="square">
-            <a:spAutoFit/>
-          </a:bodyPr>
-          <a:lstStyle/>
-          <a:p>
-            <a:pPr algn="ctr"/>
-            <a:r>
-              <a:rPr sz="1400" b="1">
-                <a:solidFill>
-                  <a:srgbClr val="1E2761"/>
-                </a:solidFill>
-                <a:latin typeface="Calibri"/>
-              </a:rPr>
-              <a:t>0.20</a:t>
-            </a:r>
-          </a:p>
-        </p:txBody>
-      </p:sp>
-      <p:sp>
-        <p:nvSpPr>
-          <p:cNvPr id="38" name="Rounded Rectangle 37"/>
-          <p:cNvSpPr/>
-          <p:nvPr/>
-        </p:nvSpPr>
-        <p:spPr>
-          <a:xfrm>
-            <a:off x="3337560" y="3429000"/>
-            <a:ext cx="2788920" cy="566928"/>
-          </a:xfrm>
-          <a:prstGeom prst="roundRect">
-            <a:avLst/>
-          </a:prstGeom>
-          <a:solidFill>
-            <a:srgbClr val="E8A838"/>
-          </a:solidFill>
-          <a:ln>
-            <a:noFill/>
-          </a:ln>
-        </p:spPr>
-        <p:style>
-          <a:lnRef idx="1">
-            <a:schemeClr val="accent1"/>
-          </a:lnRef>
-          <a:fillRef idx="3">
-            <a:schemeClr val="accent1"/>
-          </a:fillRef>
-          <a:effectRef idx="2">
-            <a:schemeClr val="accent1"/>
-          </a:effectRef>
-          <a:fontRef idx="minor">
-            <a:schemeClr val="lt1"/>
-          </a:fontRef>
-        </p:style>
-        <p:txBody>
-          <a:bodyPr rtlCol="0" anchor="ctr"/>
-          <a:lstStyle/>
-          <a:p>
-            <a:pPr algn="ctr"/>
-          </a:p>
-        </p:txBody>
-      </p:sp>
-      <p:sp>
-        <p:nvSpPr>
-          <p:cNvPr id="39" name="TextBox 38"/>
-          <p:cNvSpPr txBox="1"/>
-          <p:nvPr/>
-        </p:nvSpPr>
-        <p:spPr>
-          <a:xfrm>
-            <a:off x="3337560" y="3538728"/>
-            <a:ext cx="2788920" cy="365760"/>
-          </a:xfrm>
-          <a:prstGeom prst="rect">
-            <a:avLst/>
-          </a:prstGeom>
-          <a:noFill/>
-        </p:spPr>
-        <p:txBody>
-          <a:bodyPr wrap="square">
-            <a:spAutoFit/>
-          </a:bodyPr>
-          <a:lstStyle/>
-          <a:p>
-            <a:pPr algn="ctr"/>
-            <a:r>
-              <a:rPr sz="1400" b="1">
-                <a:solidFill>
-                  <a:srgbClr val="1E2761"/>
-                </a:solidFill>
-                <a:latin typeface="Calibri"/>
-              </a:rPr>
-              <a:t>+5.767%</a:t>
-            </a:r>
-          </a:p>
-        </p:txBody>
-      </p:sp>
-      <p:sp>
-        <p:nvSpPr>
-          <p:cNvPr id="40" name="Rounded Rectangle 39"/>
-          <p:cNvSpPr/>
-          <p:nvPr/>
-        </p:nvSpPr>
-        <p:spPr>
-          <a:xfrm>
-            <a:off x="6217920" y="3429000"/>
-            <a:ext cx="2788920" cy="566928"/>
-          </a:xfrm>
-          <a:prstGeom prst="roundRect">
-            <a:avLst/>
-          </a:prstGeom>
-          <a:solidFill>
-            <a:srgbClr val="E8A838"/>
-          </a:solidFill>
-          <a:ln>
-            <a:noFill/>
-          </a:ln>
-        </p:spPr>
-        <p:style>
-          <a:lnRef idx="1">
-            <a:schemeClr val="accent1"/>
-          </a:lnRef>
-          <a:fillRef idx="3">
-            <a:schemeClr val="accent1"/>
-          </a:fillRef>
-          <a:effectRef idx="2">
-            <a:schemeClr val="accent1"/>
-          </a:effectRef>
-          <a:fontRef idx="minor">
-            <a:schemeClr val="lt1"/>
-          </a:fontRef>
-        </p:style>
-        <p:txBody>
-          <a:bodyPr rtlCol="0" anchor="ctr"/>
-          <a:lstStyle/>
-          <a:p>
-            <a:pPr algn="ctr"/>
-          </a:p>
-        </p:txBody>
-      </p:sp>
-      <p:sp>
-        <p:nvSpPr>
-          <p:cNvPr id="41" name="TextBox 40"/>
-          <p:cNvSpPr txBox="1"/>
-          <p:nvPr/>
-        </p:nvSpPr>
-        <p:spPr>
-          <a:xfrm>
-            <a:off x="6217920" y="3538728"/>
-            <a:ext cx="2788920" cy="365760"/>
-          </a:xfrm>
-          <a:prstGeom prst="rect">
-            <a:avLst/>
-          </a:prstGeom>
-          <a:noFill/>
-        </p:spPr>
-        <p:txBody>
-          <a:bodyPr wrap="square">
-            <a:spAutoFit/>
-          </a:bodyPr>
-          <a:lstStyle/>
-          <a:p>
-            <a:pPr algn="ctr"/>
-            <a:r>
-              <a:rPr sz="1400" b="1">
-                <a:solidFill>
-                  <a:srgbClr val="1E2761"/>
-                </a:solidFill>
-                <a:latin typeface="Calibri"/>
-              </a:rPr>
-              <a:t>0.39</a:t>
-            </a:r>
-          </a:p>
-        </p:txBody>
-      </p:sp>
-      <p:sp>
-        <p:nvSpPr>
-          <p:cNvPr id="42" name="Rounded Rectangle 41"/>
-          <p:cNvSpPr/>
-          <p:nvPr/>
-        </p:nvSpPr>
-        <p:spPr>
-          <a:xfrm>
-            <a:off x="9098280" y="3429000"/>
-            <a:ext cx="2788920" cy="566928"/>
-          </a:xfrm>
-          <a:prstGeom prst="roundRect">
-            <a:avLst/>
-          </a:prstGeom>
-          <a:solidFill>
-            <a:srgbClr val="E8A838"/>
-          </a:solidFill>
-          <a:ln>
-            <a:noFill/>
-          </a:ln>
-        </p:spPr>
-        <p:style>
-          <a:lnRef idx="1">
-            <a:schemeClr val="accent1"/>
-          </a:lnRef>
-          <a:fillRef idx="3">
-            <a:schemeClr val="accent1"/>
-          </a:fillRef>
-          <a:effectRef idx="2">
-            <a:schemeClr val="accent1"/>
-          </a:effectRef>
-          <a:fontRef idx="minor">
-            <a:schemeClr val="lt1"/>
-          </a:fontRef>
-        </p:style>
-        <p:txBody>
-          <a:bodyPr rtlCol="0" anchor="ctr"/>
-          <a:lstStyle/>
-          <a:p>
-            <a:pPr algn="ctr"/>
-          </a:p>
-        </p:txBody>
-      </p:sp>
-      <p:sp>
-        <p:nvSpPr>
-          <p:cNvPr id="43" name="TextBox 42"/>
-          <p:cNvSpPr txBox="1"/>
-          <p:nvPr/>
-        </p:nvSpPr>
-        <p:spPr>
-          <a:xfrm>
-            <a:off x="9098280" y="3538728"/>
-            <a:ext cx="2788920" cy="365760"/>
-          </a:xfrm>
-          <a:prstGeom prst="rect">
-            <a:avLst/>
-          </a:prstGeom>
-          <a:noFill/>
-        </p:spPr>
-        <p:txBody>
-          <a:bodyPr wrap="square">
-            <a:spAutoFit/>
-          </a:bodyPr>
-          <a:lstStyle/>
-          <a:p>
-            <a:pPr algn="ctr"/>
-            <a:r>
-              <a:rPr sz="1400" b="1">
-                <a:solidFill>
-                  <a:srgbClr val="1E2761"/>
-                </a:solidFill>
-                <a:latin typeface="Calibri"/>
-              </a:rPr>
-              <a:t>0.37 ms</a:t>
-            </a:r>
-          </a:p>
-        </p:txBody>
-      </p:sp>
-      <p:sp>
-        <p:nvSpPr>
-          <p:cNvPr id="44" name="Rounded Rectangle 43"/>
-          <p:cNvSpPr/>
-          <p:nvPr/>
-        </p:nvSpPr>
-        <p:spPr>
-          <a:xfrm>
-            <a:off x="457200" y="4160520"/>
-            <a:ext cx="11247120" cy="1691640"/>
-          </a:xfrm>
-          <a:prstGeom prst="roundRect">
-            <a:avLst/>
-          </a:prstGeom>
-          <a:solidFill>
-            <a:srgbClr val="2A357A"/>
-          </a:solidFill>
-          <a:ln>
-            <a:noFill/>
-          </a:ln>
-        </p:spPr>
-        <p:style>
-          <a:lnRef idx="1">
-            <a:schemeClr val="accent1"/>
-          </a:lnRef>
-          <a:fillRef idx="3">
-            <a:schemeClr val="accent1"/>
-          </a:fillRef>
-          <a:effectRef idx="2">
-            <a:schemeClr val="accent1"/>
-          </a:effectRef>
-          <a:fontRef idx="minor">
-            <a:schemeClr val="lt1"/>
-          </a:fontRef>
-        </p:style>
-        <p:txBody>
-          <a:bodyPr rtlCol="0" anchor="ctr"/>
-          <a:lstStyle/>
-          <a:p>
-            <a:pPr algn="ctr"/>
-          </a:p>
-        </p:txBody>
-      </p:sp>
-      <p:sp>
-        <p:nvSpPr>
-          <p:cNvPr id="45" name="TextBox 44"/>
-          <p:cNvSpPr txBox="1"/>
-          <p:nvPr/>
-        </p:nvSpPr>
-        <p:spPr>
-          <a:xfrm>
-            <a:off x="685800" y="4343400"/>
-            <a:ext cx="10789920" cy="1325880"/>
-          </a:xfrm>
-          <a:prstGeom prst="rect">
-            <a:avLst/>
-          </a:prstGeom>
-          <a:noFill/>
-        </p:spPr>
-        <p:txBody>
-          <a:bodyPr wrap="square">
-            <a:spAutoFit/>
-          </a:bodyPr>
-          <a:lstStyle/>
-          <a:p>
-            <a:pPr algn="l"/>
-            <a:r>
-              <a:rPr sz="1600" b="0">
-                <a:solidFill>
-                  <a:srgbClr val="FFFFFF"/>
-                </a:solidFill>
-                <a:latin typeface="Calibri"/>
-              </a:rPr>
-              <a:t>Decision-support reading: keep the least chatty policy that still catches incidents.
-0.10 was the planned guess in Chapter 3. After measurement, 0.20 is the operational default.</a:t>
-            </a:r>
-          </a:p>
-        </p:txBody>
-      </p:sp>
-      <p:sp>
-        <p:nvSpPr>
-          <p:cNvPr id="46" name="Rectangle 45"/>
-          <p:cNvSpPr/>
-          <p:nvPr/>
-        </p:nvSpPr>
-        <p:spPr>
-          <a:xfrm>
-            <a:off x="0" y="6748272"/>
-            <a:ext cx="12191695" cy="109728"/>
-          </a:xfrm>
-          <a:prstGeom prst="rect">
-            <a:avLst/>
-          </a:prstGeom>
-          <a:solidFill>
-            <a:srgbClr val="E8A838"/>
-          </a:solidFill>
-          <a:ln>
-            <a:noFill/>
-          </a:ln>
-        </p:spPr>
-        <p:style>
-          <a:lnRef idx="1">
-            <a:schemeClr val="accent1"/>
-          </a:lnRef>
-          <a:fillRef idx="3">
-            <a:schemeClr val="accent1"/>
-          </a:fillRef>
-          <a:effectRef idx="2">
-            <a:schemeClr val="accent1"/>
-          </a:effectRef>
-          <a:fontRef idx="minor">
-            <a:schemeClr val="lt1"/>
-          </a:fontRef>
-        </p:style>
-        <p:txBody>
-          <a:bodyPr rtlCol="0" anchor="ctr"/>
-          <a:lstStyle/>
-          <a:p>
-            <a:pPr algn="ctr"/>
-          </a:p>
-        </p:txBody>
-      </p:sp>
-      <p:sp>
-        <p:nvSpPr>
-          <p:cNvPr id="47" name="TextBox 46"/>
+          <p:cNvPr id="17" name="TextBox 16"/>
           <p:cNvSpPr txBox="1"/>
           <p:nvPr/>
         </p:nvSpPr>
@@ -10949,7 +9965,7 @@
       </p:sp>
       <p:sp>
         <p:nvSpPr>
-          <p:cNvPr id="48" name="TextBox 47"/>
+          <p:cNvPr id="18" name="TextBox 17"/>
           <p:cNvSpPr txBox="1"/>
           <p:nvPr/>
         </p:nvSpPr>
@@ -11081,14 +10097,14 @@
                 </a:solidFill>
                 <a:latin typeface="Cambria"/>
               </a:rPr>
-              <a:t>Objective 4 — journey time (seconds)</a:t>
+              <a:t>Objective 3 — remaining-time threshold δ</a:t>
             </a:r>
           </a:p>
         </p:txBody>
       </p:sp>
       <p:pic>
         <p:nvPicPr>
-          <p:cNvPr id="4" name="Picture 3" descr="fig1_travel_time_comparison.png"/>
+          <p:cNvPr id="4" name="Picture 3" descr="fig3_delta_sensitivity.png"/>
           <p:cNvPicPr>
             <a:picLocks noChangeAspect="1"/>
           </p:cNvPicPr>
@@ -11103,7 +10119,7 @@
         <p:spPr>
           <a:xfrm>
             <a:off x="274320" y="640080"/>
-            <a:ext cx="7406640" cy="4068358"/>
+            <a:ext cx="7498079" cy="3127722"/>
           </a:xfrm>
           <a:prstGeom prst="rect">
             <a:avLst/>
@@ -11118,8 +10134,8 @@
         </p:nvSpPr>
         <p:spPr>
           <a:xfrm>
-            <a:off x="7818120" y="777240"/>
-            <a:ext cx="4023360" cy="5029200"/>
+            <a:off x="7909560" y="640080"/>
+            <a:ext cx="3886200" cy="5212080"/>
           </a:xfrm>
           <a:prstGeom prst="roundRect">
             <a:avLst/>
@@ -11161,8 +10177,8 @@
         </p:nvSpPr>
         <p:spPr>
           <a:xfrm>
-            <a:off x="8001000" y="960120"/>
-            <a:ext cx="3657600" cy="320040"/>
+            <a:off x="8092440" y="777240"/>
+            <a:ext cx="3566160" cy="320040"/>
           </a:xfrm>
           <a:prstGeom prst="rect">
             <a:avLst/>
@@ -11183,7 +10199,7 @@
                 </a:solidFill>
                 <a:latin typeface="Calibri"/>
               </a:rPr>
-              <a:t>Incident cell</a:t>
+              <a:t>Finding</a:t>
             </a:r>
           </a:p>
         </p:txBody>
@@ -11196,8 +10212,8 @@
         </p:nvSpPr>
         <p:spPr>
           <a:xfrm>
-            <a:off x="8001000" y="1371600"/>
-            <a:ext cx="3657600" cy="4114800"/>
+            <a:off x="8092440" y="1188720"/>
+            <a:ext cx="3566160" cy="4434840"/>
           </a:xfrm>
           <a:prstGeom prst="rect">
             <a:avLst/>
@@ -11212,19 +10228,19 @@
           <a:p>
             <a:pPr algn="l"/>
             <a:r>
-              <a:rPr sz="1500" b="0">
+              <a:rPr sz="1300" b="0">
                 <a:solidFill>
                   <a:srgbClr val="FFFFFF"/>
                 </a:solidFill>
                 <a:latin typeface="Calibri"/>
               </a:rPr>
-              <a:t>Dijkstra  ≈  728 s
-Framework  ≈  599 s
-Reactive A*  ≈  604 s
-Oracle  ≈  581 s
-Peak: 506 s vs 513 s
-Off-peak: both ≈ 403 s
-The framework does not beat the oracle. That is required if B4 is honest.</a:t>
+              <a:t>δ = 0.05 means: offer a new path if remaining time from the current position grows by 5%.
+Tested {0.05, 0.10, 0.15, 0.20}.
+Travel time did not move (ANOVA F ≈ 0.001, p = 1.00).
+Incident reduction stayed ≈ 16% at every δ, with about one replan per journey.
+Recommended default: δ = 0.20 — same travel time, slightly fewer alerts.
+0.10 was the Chapter 3 starting guess, not the measured default.
+δ is a policy. α = .05 is a significance level. They are not the same 0.05.</a:t>
             </a:r>
           </a:p>
         </p:txBody>
@@ -11440,14 +10456,14 @@
                 </a:solidFill>
                 <a:latin typeface="Cambria"/>
               </a:rPr>
-              <a:t>Objective 4 — reduction versus Dijkstra</a:t>
+              <a:t>Objective 4 — realised journey time</a:t>
             </a:r>
           </a:p>
         </p:txBody>
       </p:sp>
       <p:pic>
         <p:nvPicPr>
-          <p:cNvPr id="4" name="Picture 3" descr="fig2_reduction_by_scenario.png"/>
+          <p:cNvPr id="4" name="Picture 3" descr="fig1_travel_time_comparison.png"/>
           <p:cNvPicPr>
             <a:picLocks noChangeAspect="1"/>
           </p:cNvPicPr>
@@ -11462,7 +10478,7 @@
         <p:spPr>
           <a:xfrm>
             <a:off x="228600" y="640080"/>
-            <a:ext cx="7680960" cy="3034527"/>
+            <a:ext cx="7498079" cy="4118584"/>
           </a:xfrm>
           <a:prstGeom prst="rect">
             <a:avLst/>
@@ -11477,8 +10493,8 @@
         </p:nvSpPr>
         <p:spPr>
           <a:xfrm>
-            <a:off x="8001000" y="777240"/>
-            <a:ext cx="3840480" cy="5029200"/>
+            <a:off x="7818120" y="640080"/>
+            <a:ext cx="4023360" cy="5212080"/>
           </a:xfrm>
           <a:prstGeom prst="roundRect">
             <a:avLst/>
@@ -11520,8 +10536,8 @@
         </p:nvSpPr>
         <p:spPr>
           <a:xfrm>
-            <a:off x="8183879" y="914400"/>
-            <a:ext cx="3520440" cy="320040"/>
+            <a:off x="8001000" y="777240"/>
+            <a:ext cx="3657600" cy="320040"/>
           </a:xfrm>
           <a:prstGeom prst="rect">
             <a:avLst/>
@@ -11542,7 +10558,7 @@
                 </a:solidFill>
                 <a:latin typeface="Calibri"/>
               </a:rPr>
-              <a:t>Headline numbers</a:t>
+              <a:t>Mean travel time (s)</a:t>
             </a:r>
           </a:p>
         </p:txBody>
@@ -11555,8 +10571,8 @@
         </p:nvSpPr>
         <p:spPr>
           <a:xfrm>
-            <a:off x="8183879" y="1325880"/>
-            <a:ext cx="3520440" cy="4206240"/>
+            <a:off x="8001000" y="1188720"/>
+            <a:ext cx="3657600" cy="4480560"/>
           </a:xfrm>
           <a:prstGeom prst="rect">
             <a:avLst/>
@@ -11577,17 +10593,17 @@
                 </a:solidFill>
                 <a:latin typeface="Calibri"/>
               </a:rPr>
-              <a:t>Incident  +16.19%
-  t = 26.43,  p &lt; .001
-  ~1.03 replans
-Peak  +1.03%
-  t = 3.81,  p = .0002
-Off-peak  +0.01%
-  p = .90  (not significant)
-Overall  +5.74%
-vs static A*  +7.39%
-vs reactive A*  +0.61%
-vs oracle  −1.69%</a:t>
+              <a:t>Incident
+  Dijkstra  ≈  728 s
+  Framework  ≈  599 s
+  Reactive A*  ≈  604 s
+  Oracle  ≈  581 s
+Peak
+  Framework  ≈  506 s
+  Dijkstra  ≈  513 s
+Off-peak
+  Both  ≈  403 s
+The framework does not beat the oracle. That is required if B4 is an honest ceiling.</a:t>
             </a:r>
           </a:p>
         </p:txBody>
@@ -11803,14 +10819,14 @@
                 </a:solidFill>
                 <a:latin typeface="Cambria"/>
               </a:rPr>
-              <a:t>Computational feasibility — well under 1 second</a:t>
+              <a:t>Objective 4 — reduction versus Dijkstra</a:t>
             </a:r>
           </a:p>
         </p:txBody>
       </p:sp>
       <p:pic>
         <p:nvPicPr>
-          <p:cNvPr id="4" name="Picture 3" descr="fig4_computational_performance.png"/>
+          <p:cNvPr id="4" name="Picture 3" descr="fig2_reduction_by_scenario.png"/>
           <p:cNvPicPr>
             <a:picLocks noChangeAspect="1"/>
           </p:cNvPicPr>
@@ -11824,8 +10840,8 @@
         </p:blipFill>
         <p:spPr>
           <a:xfrm>
-            <a:off x="274320" y="640080"/>
-            <a:ext cx="7589520" cy="3154308"/>
+            <a:off x="228600" y="640080"/>
+            <a:ext cx="7589520" cy="2998402"/>
           </a:xfrm>
           <a:prstGeom prst="rect">
             <a:avLst/>
@@ -11840,8 +10856,8 @@
         </p:nvSpPr>
         <p:spPr>
           <a:xfrm>
-            <a:off x="8001000" y="822960"/>
-            <a:ext cx="3840480" cy="4937760"/>
+            <a:off x="7955279" y="640080"/>
+            <a:ext cx="3840480" cy="5212080"/>
           </a:xfrm>
           <a:prstGeom prst="roundRect">
             <a:avLst/>
@@ -11883,7 +10899,7 @@
         </p:nvSpPr>
         <p:spPr>
           <a:xfrm>
-            <a:off x="8183879" y="1005840"/>
+            <a:off x="8138160" y="777240"/>
             <a:ext cx="3520440" cy="320040"/>
           </a:xfrm>
           <a:prstGeom prst="rect">
@@ -11905,7 +10921,7 @@
                 </a:solidFill>
                 <a:latin typeface="Calibri"/>
               </a:rPr>
-              <a:t>What the dispatcher waits</a:t>
+              <a:t>Paired results (N = 300)</a:t>
             </a:r>
           </a:p>
         </p:txBody>
@@ -11918,8 +10934,8 @@
         </p:nvSpPr>
         <p:spPr>
           <a:xfrm>
-            <a:off x="8183879" y="1463040"/>
-            <a:ext cx="3520440" cy="4023360"/>
+            <a:off x="8138160" y="1188720"/>
+            <a:ext cx="3520440" cy="4480560"/>
           </a:xfrm>
           <a:prstGeom prst="rect">
             <a:avLst/>
@@ -11934,22 +10950,24 @@
           <a:p>
             <a:pPr algn="l"/>
             <a:r>
-              <a:rPr sz="1500" b="0">
+              <a:rPr sz="1300" b="0">
                 <a:solidFill>
                   <a:srgbClr val="FFFFFF"/>
                 </a:solidFill>
                 <a:latin typeface="Calibri"/>
               </a:rPr>
-              <a:t>TD-A*  0.37 ms
-GRU  39.3 ms
-Combined  ≈ 40 ms
-Budget  1,000 ms
-≈ 25× headroom
-Do not quote 0.315 ms
-or 69.1 ms — those were
-the old OSM / old GRU run.
-Routing is not the bottleneck.
-The predictor is, and it still fits.</a:t>
+              <a:t>Incident  +16.19%
+  t = 26.43,  p &lt; .001
+  ~1.03 replans / journey
+Peak  +1.03%
+  t = 3.81,  p = .0002
+Off-peak  +0.01%
+  p = .90  (not significant)
+Overall  +5.74%
+vs static A*  +7.39%
+vs reactive A*  +0.61%
+vs oracle  −1.69%
+Overall is a mixture. Do not promise 16% on every trip.</a:t>
             </a:r>
           </a:p>
         </p:txBody>
